--- a/slides/week01/ch01_why.pptx
+++ b/slides/week01/ch01_why.pptx
@@ -591,7 +591,7 @@
           <a:lstStyle/>
           <a:p>
             <a:r>
-              <a:t>가운데 ETA 모델이 왜 필요한지가 처음에는 잘 안 보인다. 배차는 어느 차가 가장 빨리 도착하는지를 알아야 하고 그 값이 ETA다. 직선거리로 어림하면 강을 건너야 하는 차를 가깝다고 고른다. 3장에서 도로망 최단경로로, 9장에서 통행 기록으로 학습한 모델로 구한다.</a:t>
+              <a:t>배차 알고리즘은 각 차량이 승객에게 도착하는 데 몇 분이 걸리는지 알아야 한다. 이 값을 예상 도착시간(ETA, estimated time of arrival)이라고 한다. 직선거리만 쓰면 강 건너에 있는 차량을 가장 가깝다고 잘못 고를 수 있다. 3장에서 도로망 최단경로로, 9장에서 통행 기록으로 학습한 모형으로 구한다.</a:t>
             </a:r>
           </a:p>
         </p:txBody>
@@ -661,7 +661,7 @@
           <a:lstStyle/>
           <a:p>
             <a:r>
-              <a:t>매주 어느 부분을 만들고 있는지 이 표로 확인시킨다. Vehicle Relocation은 이 책에서 다루지 않는다. 빈 차를 수요가 많은 곳으로 미리 옮기는 문제인데 배차와 수요 예측을 둘 다 알아야 손댈 수 있다.</a:t>
+              <a:t>매주 어느 부분을 만들고 있는지 이 표로 확인시킨다. 차량 재배치 알고리즘은 이 책에서 다루지 않는다. 빈 차를 수요가 많은 곳으로 미리 옮기는 문제인데 배차와 수요 예측을 둘 다 알아야 손댈 수 있다.</a:t>
             </a:r>
           </a:p>
         </p:txBody>
@@ -871,7 +871,7 @@
           <a:lstStyle/>
           <a:p>
             <a:r>
-              <a:t>교재 1장 도입부. 세 번째 질문에 답해야 앞의 두 개를 정할 수 있다는 점을 말로 설명하고 시작한다.</a:t>
+              <a:t>교재 1장 도입부. 20대를 실제로 굴리기 전에 운영안을 어떻게 비교할 수 있는지 묻고 시작한다. 답은 같은 시간대의 운영 조건만 바꿔 다시 계산하는 것이다.</a:t>
             </a:r>
           </a:p>
         </p:txBody>
@@ -1011,7 +1011,7 @@
           <a:lstStyle/>
           <a:p>
             <a:r>
-              <a:t>12장에서 지표를 정리할 때 이 세 관점이 다시 나온다. 이 과목이 만드는 것은 결국 이 표의 오른쪽 열에 들어갈 숫자다.</a:t>
+              <a:t>12장에서 승객·운영자·도시 세 관점의 지표를 계산한다. 이 과목이 만드는 것은 결국 이 표의 오른쪽 열에 들어갈 숫자다.</a:t>
             </a:r>
           </a:p>
         </p:txBody>
@@ -1081,7 +1081,7 @@
           <a:lstStyle/>
           <a:p>
             <a:r>
-              <a:t>도로망에 차량과 승객을 배치하고 시간을 1분씩 진행시키면서 전부 기록한다. 차량 수만 변경해 다시 실행하면 같은 수요와 같은 도로망에서 두 조건의 평균 대기시간을 비교할 수 있다.</a:t>
+              <a:t>차량 위치와 승객 상태를 1분 간격으로 기록한다. 차량 수만 20대에서 10대로 바꿔 다시 실행하면 같은 수요와 같은 도로망에서 두 운영안의 대기시간을 비교할 수 있다. 비교 결과는 모형에 넣은 수요와 통행시간을 전제로 한다. 호출 시각이나 통행시간이 실제와 다르면 대기시간도 달라진다. 8장에서 수요를 만들고 9장에서 통행시간 모형을 점검한다.</a:t>
             </a:r>
           </a:p>
         </p:txBody>
@@ -1151,7 +1151,7 @@
           <a:lstStyle/>
           <a:p>
             <a:r>
-              <a:t>VISSIM 화면은 교재 그림으로 함께 본다. 화면 전체가 교차로 하나다. SUMO는 TraCI로 파이썬 제어가 되어 우리 목적에 가장 가깝지만, 기본 단위가 여전히 차로 위의 차량이라 차로 변경 모형까지 계산하는 비용이 우리에게는 필요 없다.</a:t>
+              <a:t>VISSIM 화면은 교재 그림으로 함께 본다. 화면 전체가 교차로 하나이고 차량마다 차로 위 위치를 계산한다. 세밀하게 계산할수록 입력 자료와 계산량이 함께 늘어난다. SUMO는 이 책의 질문에도 쓸 수 있지만 기본 모형은 여전히 차로 위에서 움직이는 차량이다.</a:t>
             </a:r>
           </a:p>
         </p:txBody>
@@ -1221,7 +1221,7 @@
           <a:lstStyle/>
           <a:p>
             <a:r>
-              <a:t>직접 만든다고 해서 전부 새로 만드는 것은 아니다. 이 슬라이드가 학기 전체의 분업표에 해당한다.</a:t>
+              <a:t>직접 만든다고 해서 전부 새로 만드는 것은 아니다. 이 슬라이드가 학기 전체의 분담표에 해당한다.</a:t>
             </a:r>
           </a:p>
         </p:txBody>
@@ -5010,7 +5010,7 @@
           <a:lstStyle/>
           <a:p>
             <a:r>
-              <a:t>3.2 기존 도구가 맞지 않는 이유</a:t>
+              <a:t>3.2 도구별 기본 단위와 적용 범위</a:t>
             </a:r>
           </a:p>
         </p:txBody>
@@ -5053,19 +5053,25 @@
           <a:p>
             <a:pPr/>
             <a:r>
-              <a:t>차이의 원인: 성능 아닌 기본 단위</a:t>
+              <a:t>도구 선택 기준: 분석할 질문과 필요한 해상도</a:t>
             </a:r>
           </a:p>
           <a:p>
             <a:pPr/>
             <a:r>
-              <a:t>미시 시뮬레이터: 차간거리·차로 변경을 초 단위 계산</a:t>
+              <a:t>미시 교통류 시뮬레이터: 차간거리·차로 변경을 시간 단위로 계산</a:t>
             </a:r>
           </a:p>
           <a:p>
             <a:pPr/>
             <a:r>
-              <a:t>상용 라이선스 → 반복 실험 제약</a:t>
+              <a:t>상용 도구 → 배차 과정을 코드로 구현하는 실습에는 부적합</a:t>
+            </a:r>
+          </a:p>
+          <a:p>
+            <a:pPr/>
+            <a:r>
+              <a:t>SUMO: TraCI로 실행 중 차량 제어, 수요응답 모의도 가능</a:t>
             </a:r>
           </a:p>
         </p:txBody>
@@ -5086,7 +5092,7 @@
           <a:lstStyle/>
           <a:p>
             <a:r>
-              <a:t>표 2. 세 도구의 기본 단위와 잘 답하는 질문</a:t>
+              <a:t>표 2. 세 도구의 기본 단위와 분석에 적합한 질문</a:t>
             </a:r>
           </a:p>
         </p:txBody>
@@ -5230,7 +5236,7 @@
                           </a:solidFill>
                           <a:latin typeface="Pretendard Medium"/>
                         </a:rPr>
-                        <a:t>잘 답하는 질문</a:t>
+                        <a:t>적합한 질문</a:t>
                       </a:r>
                     </a:p>
                   </a:txBody>
@@ -5777,7 +5783,7 @@
           <a:lstStyle/>
           <a:p>
             <a:r>
-              <a:t>3.3 필요한 조건과 재료</a:t>
+              <a:t>3.3 이 책 모형의 범위와 재료</a:t>
             </a:r>
           </a:p>
         </p:txBody>
@@ -5820,43 +5826,37 @@
           <a:p>
             <a:pPr/>
             <a:r>
-              <a:t>필요한 조건 3가지</a:t>
+              <a:t>생략하는 것: 차로 안에서의 차량 움직임</a:t>
+            </a:r>
+          </a:p>
+          <a:p>
+            <a:pPr/>
+            <a:r>
+              <a:t>기록하는 것: 차량이 몇 시 몇 분에 어느 노드에 있는지</a:t>
             </a:r>
           </a:p>
           <a:p>
             <a:pPr lvl="1"/>
             <a:r>
-              <a:t>해상도: 시각별 노드 위치로 충분</a:t>
+              <a:t>수강생이 배차 규칙을 코드로 바꿔 다시 실행</a:t>
+            </a:r>
+          </a:p>
+          <a:p>
+            <a:pPr/>
+            <a:r>
+              <a:t>재료는 이미 공개</a:t>
             </a:r>
           </a:p>
           <a:p>
             <a:pPr lvl="1"/>
             <a:r>
-              <a:t>공간 범위: 교차로가 아니라 도시 전체</a:t>
-            </a:r>
-          </a:p>
-          <a:p>
-            <a:pPr lvl="1"/>
-            <a:r>
-              <a:t>반복 실행: 노트북에서 값 변경 후 재실행</a:t>
+              <a:t>도로망 OpenStreetMap (2장) · 최단경로 직접 구현 (3장) · 시간표 GTFS (5장)</a:t>
             </a:r>
           </a:p>
           <a:p>
             <a:pPr/>
             <a:r>
-              <a:t>재료는 이미 공개</a:t>
-            </a:r>
-          </a:p>
-          <a:p>
-            <a:pPr lvl="1"/>
-            <a:r>
-              <a:t>도로망 OpenStreetMap (2장) · 최단경로 직접 구현 (3장) · 시간표 GTFS (5장)</a:t>
-            </a:r>
-          </a:p>
-          <a:p>
-            <a:pPr/>
-            <a:r>
-              <a:t>새로 쓰는 것: 재료를 시간 축 위에서 움직이는 수백 줄</a:t>
+              <a:t>새로 작성: 호출 발생, 배차, 차량 이동을 처리하는 코드</a:t>
             </a:r>
           </a:p>
         </p:txBody>
@@ -6104,13 +6104,13 @@
           <a:p>
             <a:pPr/>
             <a:r>
-              <a:t>평균 4.1분 — 여기까지는 양호</a:t>
+              <a:t>평균 4.1분 — 오래 기다리지 않은 것으로 보이는 값</a:t>
             </a:r>
           </a:p>
           <a:p>
             <a:pPr/>
             <a:r>
-              <a:t>평균 하나로는 41분 승객이 보이지 않음</a:t>
+              <a:t>평균 하나로는 41분 기다린 승객이 보이지 않음</a:t>
             </a:r>
           </a:p>
         </p:txBody>
@@ -6653,31 +6653,25 @@
           <a:p>
             <a:pPr/>
             <a:r>
-              <a:t>차량 80대의 실제 사용</a:t>
+              <a:t>시간대별 차량 상태 평균</a:t>
             </a:r>
           </a:p>
           <a:p>
             <a:pPr lvl="1"/>
             <a:r>
-              <a:t>승객 태운 차 평균 10대 · 서 있던 차 31대</a:t>
-            </a:r>
-          </a:p>
-          <a:p>
-            <a:pPr lvl="1"/>
-            <a:r>
-              <a:t>가동률 약 27%</a:t>
+              <a:t>승객 태운 차 10대 · 빈 차 31대</a:t>
             </a:r>
           </a:p>
           <a:p>
             <a:pPr/>
             <a:r>
-              <a:t>다음 질문: 차량 절반 감축 시 대기시간 변화</a:t>
+              <a:t>다음 질문: 차량 절반 감축 시 평균 대기시간과 장시간 대기 승객 수</a:t>
             </a:r>
           </a:p>
           <a:p>
             <a:pPr/>
             <a:r>
-              <a:t>40대로도 최대 대기 41분이 늘지 않으면 → 나머지 40대 타 지역 배치</a:t>
+              <a:t>함께 볼 것: 990건 중 배차되지 못한 호출의 발생 여부</a:t>
             </a:r>
           </a:p>
         </p:txBody>
@@ -6819,7 +6813,7 @@
               <a:t>5.1  </a:t>
             </a:r>
             <a:r>
-              <a:t>시뮬레이터의 네 부분</a:t>
+              <a:t>시뮬레이터의 네 단계</a:t>
             </a:r>
           </a:p>
           <a:p>
@@ -6837,7 +6831,7 @@
               <a:t>5.2  </a:t>
             </a:r>
             <a:r>
-              <a:t>각 상자와 대응하는 장</a:t>
+              <a:t>구성요소와 대응하는 장</a:t>
             </a:r>
           </a:p>
         </p:txBody>
@@ -6876,7 +6870,7 @@
           <a:lstStyle/>
           <a:p>
             <a:r>
-              <a:t>5.1 시뮬레이터의 네 부분</a:t>
+              <a:t>5.1 시뮬레이터의 네 단계</a:t>
             </a:r>
           </a:p>
         </p:txBody>
@@ -6919,19 +6913,19 @@
           <a:p>
             <a:pPr/>
             <a:r>
-              <a:t>흐름: 데이터 → 보정 → 운영 → 지표</a:t>
+              <a:t>흐름: 데이터 준비 → 모형 보정 → 서비스 운영 → 결과 분석</a:t>
             </a:r>
           </a:p>
           <a:p>
             <a:pPr/>
             <a:r>
-              <a:t>각 상자가 이 책의 장에 대응</a:t>
+              <a:t>서비스 운영 단계의 구성: 수요·차량 생성, 재배치, 배차, 차량 이동</a:t>
             </a:r>
           </a:p>
           <a:p>
             <a:pPr/>
             <a:r>
-              <a:t>주차별 진도의 기준</a:t>
+              <a:t>각 구성요소가 이 책의 장에 대응 — 주차별 진도의 기준</a:t>
             </a:r>
           </a:p>
         </p:txBody>
@@ -6952,7 +6946,7 @@
           <a:lstStyle/>
           <a:p>
             <a:r>
-              <a:t>그림 1. 데이터 수집부터 지표 산출까지 시뮬레이터의 네 부분</a:t>
+              <a:t>그림 1. 데이터 준비부터 결과 분석까지 시뮬레이터의 네 단계</a:t>
             </a:r>
           </a:p>
         </p:txBody>
@@ -7063,7 +7057,7 @@
           <a:lstStyle/>
           <a:p>
             <a:r>
-              <a:t>5.2 각 상자와 대응하는 장</a:t>
+              <a:t>5.2 구성요소와 대응하는 장</a:t>
             </a:r>
           </a:p>
         </p:txBody>
@@ -7105,7 +7099,7 @@
           <a:lstStyle/>
           <a:p>
             <a:r>
-              <a:t>표 4. 시뮬레이터의 각 부분과 그것을 다루는 장</a:t>
+              <a:t>표 4. 시뮬레이터의 각 구성요소와 그것을 다루는 장</a:t>
             </a:r>
           </a:p>
         </p:txBody>
@@ -7146,7 +7140,7 @@
                           </a:solidFill>
                           <a:latin typeface="Pretendard Medium"/>
                         </a:rPr>
-                        <a:t>부분</a:t>
+                        <a:t>구성요소</a:t>
                       </a:r>
                     </a:p>
                   </a:txBody>
@@ -7286,7 +7280,7 @@
                           </a:solidFill>
                           <a:latin typeface="Pretendard Medium"/>
                         </a:rPr>
-                        <a:t>도로망·시간표·통행 기록 수집</a:t>
+                        <a:t>도로망·시간표·통행 기록 준비</a:t>
                       </a:r>
                     </a:p>
                   </a:txBody>
@@ -7396,7 +7390,7 @@
                           </a:solidFill>
                           <a:latin typeface="Pretendard Medium"/>
                         </a:rPr>
-                        <a:t>소요시간 예측과 차량 이동</a:t>
+                        <a:t>통행시간 계산과 차량 위치 갱신</a:t>
                       </a:r>
                     </a:p>
                   </a:txBody>
@@ -7506,7 +7500,7 @@
                           </a:solidFill>
                           <a:latin typeface="Pretendard Medium"/>
                         </a:rPr>
-                        <a:t>호출 발생과 차량 배치</a:t>
+                        <a:t>호출 시각·위치와 차량 수·초기 위치</a:t>
                       </a:r>
                     </a:p>
                   </a:txBody>
@@ -7726,7 +7720,7 @@
                           </a:solidFill>
                           <a:latin typeface="Pretendard Medium"/>
                         </a:rPr>
-                        <a:t>지표 계산과 시각화</a:t>
+                        <a:t>대기시간·차량 상태 계산과 시각화</a:t>
                       </a:r>
                     </a:p>
                   </a:txBody>
@@ -8034,7 +8028,7 @@
           <a:p>
             <a:pPr lvl="1"/>
             <a:r>
-              <a:t>VISSIM·SUMO는 차로 단위 해상도용 — 필요한 것은 도시 단위 범위</a:t>
+              <a:t>이 책은 차로 변경을 생략하고 호출 발생·배차·차량 이동을 직접 구현</a:t>
             </a:r>
           </a:p>
           <a:p>
@@ -8052,7 +8046,7 @@
           <a:p>
             <a:pPr/>
             <a:r>
-              <a:t>네 부분이 2장부터 12장에 하나씩 대응</a:t>
+              <a:t>네 단계와 구성요소를 2장부터 12장까지 나누어 진행</a:t>
             </a:r>
           </a:p>
         </p:txBody>
@@ -8493,7 +8487,7 @@
                           </a:solidFill>
                           <a:latin typeface="Pretendard Medium"/>
                         </a:rPr>
-                        <a:t>3.1 한 달 운영으로 얻는 것  ·  3.2 기존 도구가 맞지 않는 이유  ·  3.3 필요한 조건과 재료</a:t>
+                        <a:t>3.1 한 달 운영으로 얻는 것  ·  3.2 도구별 기본 단위와 적용 범위  ·  3.3 이 책 모형의 범위와 재료</a:t>
                       </a:r>
                     </a:p>
                   </a:txBody>
@@ -8713,7 +8707,7 @@
                           </a:solidFill>
                           <a:latin typeface="Pretendard Medium"/>
                         </a:rPr>
-                        <a:t>5.1 시뮬레이터의 네 부분  ·  5.2 각 상자와 대응하는 장</a:t>
+                        <a:t>5.1 시뮬레이터의 네 단계  ·  5.2 구성요소와 대응하는 장</a:t>
                       </a:r>
                     </a:p>
                   </a:txBody>
@@ -9001,7 +8995,7 @@
           <a:p>
             <a:pPr/>
             <a:r>
-              <a:t>다음 장: 2장 도로망 데이터 — 네 부분 중 첫 번째 상자</a:t>
+              <a:t>다음 장: 2장 도로망 데이터 — 데이터 준비 단계의 첫 자료</a:t>
             </a:r>
           </a:p>
         </p:txBody>
@@ -9324,7 +9318,7 @@
           <a:p>
             <a:pPr/>
             <a:r>
-              <a:t>수요응답형 버스 20대 투입 시 결정 사항 3가지</a:t>
+              <a:t>수요응답형 버스 20대 운행 시 결정 사항</a:t>
             </a:r>
           </a:p>
           <a:p>
@@ -9336,25 +9330,19 @@
           <a:p>
             <a:pPr lvl="1"/>
             <a:r>
-              <a:t>호출 중복 시 탑승 우선순위</a:t>
-            </a:r>
-          </a:p>
-          <a:p>
-            <a:pPr lvl="1"/>
-            <a:r>
-              <a:t>승객 평균 대기시간</a:t>
+              <a:t>호출 중복 시 배차 순서</a:t>
             </a:r>
           </a:p>
           <a:p>
             <a:pPr/>
             <a:r>
-              <a:t>세 번째에 답 없으면 앞의 두 개도 결정 불가</a:t>
+              <a:t>배치와 배차 규칙에 따른 승객 대기시간 변화</a:t>
             </a:r>
           </a:p>
           <a:p>
             <a:pPr/>
             <a:r>
-              <a:t>이 장의 범위: 그 답을 얻는 방법</a:t>
+              <a:t>이 장의 범위: 운행 전에 운영안을 비교하는 방법</a:t>
             </a:r>
           </a:p>
         </p:txBody>
@@ -9490,7 +9478,7 @@
           <a:p>
             <a:pPr/>
             <a:r>
-              <a:t>VISSIM·SUMO가 이 문제에 맞지 않는 이유</a:t>
+              <a:t>VISSIM·SUMO와 이 책 시뮬레이터의 차이</a:t>
             </a:r>
           </a:p>
           <a:p>
@@ -9502,7 +9490,7 @@
           <a:p>
             <a:pPr/>
             <a:r>
-              <a:t>시뮬레이터의 네 부분과 각각을 다루는 장</a:t>
+              <a:t>시뮬레이터의 네 단계와 각 장의 관계</a:t>
             </a:r>
           </a:p>
         </p:txBody>
@@ -9726,7 +9714,7 @@
           <a:p>
             <a:pPr/>
             <a:r>
-              <a:t>대상: 사람·물건 이동 장치 전부</a:t>
+              <a:t>대상: 사람과 물건의 이동에 쓰는 수단과 운영 체계</a:t>
             </a:r>
           </a:p>
           <a:p>
@@ -9744,7 +9732,7 @@
           <a:p>
             <a:pPr/>
             <a:r>
-              <a:t>좋음의 조건: 개선분과 포기분을 함께 수치로</a:t>
+              <a:t>비교 방법: 증차 10대 시 대기시간과 빈 차량 수를 함께 계산</a:t>
             </a:r>
           </a:p>
         </p:txBody>
@@ -10386,7 +10374,7 @@
               <a:t>3.2  </a:t>
             </a:r>
             <a:r>
-              <a:t>기존 도구가 맞지 않는 이유</a:t>
+              <a:t>도구별 기본 단위와 적용 범위</a:t>
             </a:r>
           </a:p>
           <a:p>
@@ -10404,7 +10392,7 @@
               <a:t>3.3  </a:t>
             </a:r>
             <a:r>
-              <a:t>필요한 조건과 재료</a:t>
+              <a:t>이 책 모형의 범위와 재료</a:t>
             </a:r>
           </a:p>
         </p:txBody>
@@ -10486,13 +10474,13 @@
           <a:p>
             <a:pPr/>
             <a:r>
-              <a:t>실제 20대 한 달 운영 → 시나리오 1개</a:t>
+              <a:t>실제 20대 한 달 운영 → 20대와 선택한 배차 규칙의 기록 하나</a:t>
             </a:r>
           </a:p>
           <a:p>
             <a:pPr/>
             <a:r>
-              <a:t>그래도 답할 수 없는 질문</a:t>
+              <a:t>그 기록으로 답하기 어려운 질문</a:t>
             </a:r>
           </a:p>
           <a:p>
@@ -10508,21 +10496,15 @@
             </a:r>
           </a:p>
           <a:p>
-            <a:pPr lvl="1"/>
-            <a:r>
-              <a:t>최근접 차량 대신 최단 도착 차량 배차</a:t>
-            </a:r>
-          </a:p>
-          <a:p>
             <a:pPr/>
             <a:r>
-              <a:t>대안 비교 조건: 같은 한 달을 조건만 바꿔 재관찰 — 실제 도시에서 불가</a:t>
+              <a:t>대안 비교 조건: 같은 기간을 조건만 바꿔 재관찰 — 실제 도시에서 불가</a:t>
             </a:r>
           </a:p>
           <a:p>
             <a:pPr/>
             <a:r>
-              <a:t>시뮬레이션: 반복 관찰을 계산으로 대체</a:t>
+              <a:t>시뮬레이션: 반복 관찰을 계산으로 대체 — 1분 간격 진행</a:t>
             </a:r>
           </a:p>
         </p:txBody>

--- a/slides/week01/ch01_why.pptx
+++ b/slides/week01/ch01_why.pptx
@@ -26,6 +26,7 @@
     <p:sldId id="274" r:id="rId25"/>
     <p:sldId id="275" r:id="rId26"/>
     <p:sldId id="276" r:id="rId27"/>
+    <p:sldId id="277" r:id="rId28"/>
   </p:sldIdLst>
   <p:notesMasterIdLst>
     <p:notesMasterId r:id="rId15"/>
@@ -591,7 +592,7 @@
           <a:lstStyle/>
           <a:p>
             <a:r>
-              <a:t>배차 알고리즘은 각 차량이 승객에게 도착하는 데 몇 분이 걸리는지 알아야 한다. 이 값을 예상 도착시간(ETA, estimated time of arrival)이라고 한다. 직선거리만 쓰면 강 건너에 있는 차량을 가장 가깝다고 잘못 고를 수 있다. 3장에서 도로망 최단경로로, 9장에서 통행 기록으로 학습한 모형으로 구한다.</a:t>
+              <a:t>이 질문에 답하려면 같은 저녁을 40대로 다시 실행해야 한다. 실제 운영에서는 불가능하고 시뮬레이터에서는 인자 하나만 변경하면 된다. 다만 교재 녹화본에는 80대 결과만 있어서 40대로 실행하려면 DTUMOS 서버가 필요하다(부록 B). 11장에서 직접 짠 루프로 답한다.</a:t>
             </a:r>
           </a:p>
         </p:txBody>
@@ -661,7 +662,7 @@
           <a:lstStyle/>
           <a:p>
             <a:r>
-              <a:t>매주 어느 부분을 만들고 있는지 이 표로 확인시킨다. 차량 재배치 알고리즘은 이 책에서 다루지 않는다. 빈 차를 수요가 많은 곳으로 미리 옮기는 문제인데 배차와 수요 예측을 둘 다 알아야 손댈 수 있다.</a:t>
+              <a:t>배차 알고리즘은 각 차량이 승객에게 도착하는 데 몇 분이 걸리는지 알아야 한다. 이 값을 예상 도착시간(ETA, estimated time of arrival)이라고 한다. 직선거리만 쓰면 강 건너에 있는 차량을 가장 가깝다고 잘못 고를 수 있다. 3장에서 도로망 최단경로로, 9장에서 통행 기록으로 학습한 모형으로 구한다.</a:t>
             </a:r>
           </a:p>
         </p:txBody>
@@ -731,7 +732,7 @@
           <a:lstStyle/>
           <a:p>
             <a:r>
-              <a:t>학습 목표 네 가지에 각각 답이 나왔는지 확인한다. 마지막 항목이 다음 시간으로 이어진다.</a:t>
+              <a:t>매주 어느 부분을 만들고 있는지 이 표로 확인시킨다. 차량 재배치 알고리즘은 이 책에서 다루지 않는다. 빈 차를 수요가 많은 곳으로 미리 옮기는 문제인데 배차와 수요 예측을 둘 다 알아야 손댈 수 있다.</a:t>
             </a:r>
           </a:p>
         </p:txBody>
@@ -801,6 +802,76 @@
           <a:lstStyle/>
           <a:p>
             <a:r>
+              <a:t>학습 목표 네 가지에 각각 답이 나왔는지 확인한다. 마지막 항목이 다음 시간으로 이어진다.</a:t>
+            </a:r>
+          </a:p>
+        </p:txBody>
+      </p:sp>
+      <p:sp>
+        <p:nvSpPr>
+          <p:cNvPr id="4" name="Slide Number Placeholder 3"/>
+          <p:cNvSpPr>
+            <a:spLocks noGrp="1"/>
+          </p:cNvSpPr>
+          <p:nvPr>
+            <p:ph type="sldNum" idx="5" sz="quarter"/>
+          </p:nvPr>
+        </p:nvSpPr>
+        <p:spPr/>
+      </p:sp>
+    </p:spTree>
+  </p:cSld>
+  <p:clrMapOvr>
+    <a:masterClrMapping/>
+  </p:clrMapOvr>
+</p:notes>
+</file>
+
+<file path=ppt/notesSlides/notesSlide14.xml><?xml version="1.0" encoding="utf-8"?>
+<p:notes xmlns:a="http://schemas.openxmlformats.org/drawingml/2006/main" xmlns:p="http://schemas.openxmlformats.org/presentationml/2006/main" xmlns:r="http://schemas.openxmlformats.org/officeDocument/2006/relationships">
+  <p:cSld>
+    <p:spTree>
+      <p:nvGrpSpPr>
+        <p:cNvPr id="1" name=""/>
+        <p:cNvGrpSpPr/>
+        <p:nvPr/>
+      </p:nvGrpSpPr>
+      <p:grpSpPr>
+        <a:xfrm>
+          <a:off x="0" y="0"/>
+          <a:ext cx="0" cy="0"/>
+          <a:chOff x="0" y="0"/>
+          <a:chExt cx="0" cy="0"/>
+        </a:xfrm>
+      </p:grpSpPr>
+      <p:sp>
+        <p:nvSpPr>
+          <p:cNvPr id="2" name="Slide Image Placeholder 1"/>
+          <p:cNvSpPr>
+            <a:spLocks noGrp="1"/>
+          </p:cNvSpPr>
+          <p:nvPr>
+            <p:ph type="sldImg" idx="2"/>
+          </p:nvPr>
+        </p:nvSpPr>
+        <p:spPr/>
+      </p:sp>
+      <p:sp>
+        <p:nvSpPr>
+          <p:cNvPr id="3" name="Notes Placeholder 2"/>
+          <p:cNvSpPr>
+            <a:spLocks noGrp="1"/>
+          </p:cNvSpPr>
+          <p:nvPr>
+            <p:ph type="body" idx="3" sz="quarter"/>
+          </p:nvPr>
+        </p:nvSpPr>
+        <p:spPr/>
+        <p:txBody>
+          <a:bodyPr/>
+          <a:lstStyle/>
+          <a:p>
+            <a:r>
               <a:t>더 읽을거리는 교재 1장 끝에 있다. Lopez et al.(2018)은 TraCI 부분만, Horni et al.(2016)은 MATSim의 다른 접근을 본다.</a:t>
             </a:r>
           </a:p>
@@ -1011,7 +1082,7 @@
           <a:lstStyle/>
           <a:p>
             <a:r>
-              <a:t>12장에서 승객·운영자·도시 세 관점의 지표를 계산한다. 이 과목이 만드는 것은 결국 이 표의 오른쪽 열에 들어갈 숫자다.</a:t>
+              <a:t>슬라이드는 개요만 다룬다. 세부 내용과 코드는 교재 원고와 실습 노트북에서 확인한다. 교재 저장소는 비공개이므로 초대받은 계정으로 로그인한 상태여야 주소가 열린다.</a:t>
             </a:r>
           </a:p>
         </p:txBody>
@@ -1081,7 +1152,7 @@
           <a:lstStyle/>
           <a:p>
             <a:r>
-              <a:t>차량 위치와 승객 상태를 1분 간격으로 기록한다. 차량 수만 20대에서 10대로 바꿔 다시 실행하면 같은 수요와 같은 도로망에서 두 운영안의 대기시간을 비교할 수 있다. 비교 결과는 모형에 넣은 수요와 통행시간을 전제로 한다. 호출 시각이나 통행시간이 실제와 다르면 대기시간도 달라진다. 8장에서 수요를 만들고 9장에서 통행시간 모형을 점검한다.</a:t>
+              <a:t>12장에서 승객·운영자·도시 세 관점의 지표를 계산한다. 이 과목이 만드는 것은 결국 이 표의 오른쪽 열에 들어갈 숫자다.</a:t>
             </a:r>
           </a:p>
         </p:txBody>
@@ -1151,7 +1222,7 @@
           <a:lstStyle/>
           <a:p>
             <a:r>
-              <a:t>VISSIM 화면은 교재 그림으로 함께 본다. 화면 전체가 교차로 하나이고 차량마다 차로 위 위치를 계산한다. 세밀하게 계산할수록 입력 자료와 계산량이 함께 늘어난다. SUMO는 이 책의 질문에도 쓸 수 있지만 기본 모형은 여전히 차로 위에서 움직이는 차량이다.</a:t>
+              <a:t>차량 위치와 승객 상태를 1분 간격으로 기록한다. 차량 수만 20대에서 10대로 바꿔 다시 실행하면 같은 수요와 같은 도로망에서 두 운영안의 대기시간을 비교할 수 있다. 비교 결과는 모형에 넣은 수요와 통행시간을 전제로 한다. 호출 시각이나 통행시간이 실제와 다르면 대기시간도 달라진다. 8장에서 수요를 만들고 9장에서 통행시간 모형을 점검한다.</a:t>
             </a:r>
           </a:p>
         </p:txBody>
@@ -1221,7 +1292,7 @@
           <a:lstStyle/>
           <a:p>
             <a:r>
-              <a:t>직접 만든다고 해서 전부 새로 만드는 것은 아니다. 이 슬라이드가 학기 전체의 분담표에 해당한다.</a:t>
+              <a:t>VISSIM 화면은 교재 그림으로 함께 본다. 화면 전체가 교차로 하나이고 차량마다 차로 위 위치를 계산한다. 세밀하게 계산할수록 입력 자료와 계산량이 함께 늘어난다. SUMO는 이 책의 질문에도 쓸 수 있지만 기본 모형은 여전히 차로 위에서 움직이는 차량이다.</a:t>
             </a:r>
           </a:p>
         </p:txBody>
@@ -1291,7 +1362,7 @@
           <a:lstStyle/>
           <a:p>
             <a:r>
-              <a:t>교재 1.3에서 sim.passengers의 대기시간 분위수를 직접 뽑는다. 평균과 분포를 함께 보는 습관이 이 과목 전체에 걸쳐 반복된다.</a:t>
+              <a:t>직접 만든다고 해서 전부 새로 만드는 것은 아니다. 이 슬라이드가 학기 전체의 분담표에 해당한다.</a:t>
             </a:r>
           </a:p>
         </p:txBody>
@@ -1361,7 +1432,7 @@
           <a:lstStyle/>
           <a:p>
             <a:r>
-              <a:t>이 질문에 답하려면 같은 저녁을 40대로 다시 실행해야 한다. 실제 운영에서는 불가능하고 시뮬레이터에서는 인자 하나만 변경하면 된다. 다만 교재 녹화본에는 80대 결과만 있어서 40대로 실행하려면 DTUMOS 서버가 필요하다(부록 B). 11장에서 직접 짠 루프로 답한다.</a:t>
+              <a:t>교재 1.3에서 sim.passengers의 대기시간 분위수를 직접 뽑는다. 평균과 분포를 함께 보는 습관이 이 과목 전체에 걸쳐 반복된다.</a:t>
             </a:r>
           </a:p>
         </p:txBody>
@@ -5010,7 +5081,7 @@
           <a:lstStyle/>
           <a:p>
             <a:r>
-              <a:t>3.2 도구별 기본 단위와 적용 범위</a:t>
+              <a:t>3.1 한 달 운영으로 얻는 것</a:t>
             </a:r>
           </a:p>
         </p:txBody>
@@ -5053,37 +5124,115 @@
           <a:p>
             <a:pPr/>
             <a:r>
-              <a:t>도구 선택 기준: 분석할 질문과 필요한 해상도</a:t>
+              <a:t>실제 20대 한 달 운영 → 20대와 선택한 배차 규칙의 기록 하나</a:t>
             </a:r>
           </a:p>
           <a:p>
             <a:pPr/>
             <a:r>
-              <a:t>미시 교통류 시뮬레이터: 차간거리·차로 변경을 시간 단위로 계산</a:t>
+              <a:t>그 기록으로 답하기 어려운 질문</a:t>
+            </a:r>
+          </a:p>
+          <a:p>
+            <a:pPr lvl="1"/>
+            <a:r>
+              <a:t>10대였을 때의 대기시간</a:t>
+            </a:r>
+          </a:p>
+          <a:p>
+            <a:pPr lvl="1"/>
+            <a:r>
+              <a:t>차고지 2곳 분산 배치</a:t>
             </a:r>
           </a:p>
           <a:p>
             <a:pPr/>
             <a:r>
-              <a:t>상용 도구 → 배차 과정을 코드로 구현하는 실습에는 부적합</a:t>
+              <a:t>대안 비교 조건: 같은 기간을 조건만 바꿔 재관찰 — 실제 도시에서 불가</a:t>
             </a:r>
           </a:p>
           <a:p>
             <a:pPr/>
             <a:r>
-              <a:t>SUMO: TraCI로 실행 중 차량 제어, 수요응답 모의도 가능</a:t>
-            </a:r>
-          </a:p>
-        </p:txBody>
-      </p:sp>
-      <p:sp>
-        <p:nvSpPr>
-          <p:cNvPr id="5" name="Text Placeholder 4"/>
-          <p:cNvSpPr>
-            <a:spLocks noGrp="1"/>
-          </p:cNvSpPr>
-          <p:nvPr>
-            <p:ph type="body" idx="103"/>
+              <a:t>시뮬레이션: 반복 관찰을 계산으로 대체 — 1분 간격 진행</a:t>
+            </a:r>
+          </a:p>
+        </p:txBody>
+      </p:sp>
+      <p:sp>
+        <p:nvSpPr>
+          <p:cNvPr id="25" name="Slide Number Placeholder 0"/>
+          <p:cNvSpPr>
+            <a:spLocks noGrp="1"/>
+          </p:cNvSpPr>
+          <p:nvPr>
+            <p:ph type="sldNum" sz="quarter" idx="4294967295"/>
+          </p:nvPr>
+        </p:nvSpPr>
+        <p:spPr>
+          <a:xfrm>
+            <a:off x="10591495" y="6355080"/>
+            <a:ext cx="914400" cy="274320"/>
+          </a:xfrm>
+          <a:prstGeom prst="rect">
+            <a:avLst/>
+          </a:prstGeom>
+          <a:extLst>
+            <a:ext uri="{C572A759-6A51-4108-AA02-DFA0A04FC94B}">
+              <ma14:wrappingTextBoxFlag xmlns:ma14="http://schemas.microsoft.com/office/mac/drawingml/2011/main" val="0"/>
+            </a:ext>
+          </a:extLst>
+        </p:spPr>
+        <p:txBody>
+          <a:bodyPr/>
+          <a:lstStyle>
+            <a:lvl1pPr>
+              <a:defRPr sz="1000">
+                <a:solidFill>
+                  <a:srgbClr val="AFAFAF"/>
+                </a:solidFill>
+                <a:latin typeface="Pretendard Medium"/>
+                <a:ea typeface="Pretendard Medium"/>
+                <a:cs typeface="Pretendard Medium"/>
+              </a:defRPr>
+            </a:lvl1pPr>
+          </a:lstStyle>
+          <a:p>
+            <a:pPr algn="r"/>
+            <a:fld id="{F7021451-1387-4CA6-816F-3879F97B5CBC}" type="slidenum">
+              <a:rPr b="0" lang="en-US"/>
+              <a:t>1004</a:t>
+            </a:fld>
+            <a:endParaRPr lang="en-US"/>
+          </a:p>
+        </p:txBody>
+      </p:sp>
+    </p:spTree>
+  </p:cSld>
+  <p:clrMapOvr>
+    <a:masterClrMapping/>
+  </p:clrMapOvr>
+</p:sld>
+</file>
+
+<file path=ppt/slides/slide11.xml><?xml version="1.0" encoding="utf-8"?>
+<p:sld xmlns:a="http://schemas.openxmlformats.org/drawingml/2006/main" xmlns:p="http://schemas.openxmlformats.org/presentationml/2006/main" xmlns:r="http://schemas.openxmlformats.org/officeDocument/2006/relationships">
+  <p:cSld>
+    <p:spTree>
+      <p:nvGrpSpPr>
+        <p:cNvPr id="1" name=""/>
+        <p:cNvGrpSpPr/>
+        <p:nvPr/>
+      </p:nvGrpSpPr>
+      <p:grpSpPr/>
+      <p:sp>
+        <p:nvSpPr>
+          <p:cNvPr id="2" name="Title 1"/>
+          <p:cNvSpPr>
+            <a:spLocks noGrp="1"/>
+          </p:cNvSpPr>
+          <p:nvPr>
+            <p:ph type="title" idx="100"/>
           </p:nvPr>
         </p:nvSpPr>
         <p:spPr/>
@@ -5092,7 +5241,89 @@
           <a:lstStyle/>
           <a:p>
             <a:r>
-              <a:t>표 2. 세 도구의 기본 단위와 분석에 적합한 질문</a:t>
+              <a:t>3.2 도구별 기본 단위와 적용 범위</a:t>
+            </a:r>
+          </a:p>
+        </p:txBody>
+      </p:sp>
+      <p:sp>
+        <p:nvSpPr>
+          <p:cNvPr id="3" name="Text Placeholder 2"/>
+          <p:cNvSpPr>
+            <a:spLocks noGrp="1"/>
+          </p:cNvSpPr>
+          <p:nvPr>
+            <p:ph type="body" idx="101"/>
+          </p:nvPr>
+        </p:nvSpPr>
+        <p:spPr/>
+        <p:txBody>
+          <a:bodyPr/>
+          <a:lstStyle/>
+          <a:p>
+            <a:r>
+              <a:t>3. 교재 1.2 시뮬레이션이 필요한 이유</a:t>
+            </a:r>
+          </a:p>
+        </p:txBody>
+      </p:sp>
+      <p:sp>
+        <p:nvSpPr>
+          <p:cNvPr id="4" name="Text Placeholder 3"/>
+          <p:cNvSpPr>
+            <a:spLocks noGrp="1"/>
+          </p:cNvSpPr>
+          <p:nvPr>
+            <p:ph type="body" idx="102"/>
+          </p:nvPr>
+        </p:nvSpPr>
+        <p:spPr/>
+        <p:txBody>
+          <a:bodyPr/>
+          <a:lstStyle/>
+          <a:p>
+            <a:pPr/>
+            <a:r>
+              <a:t>도구 선택 기준: 분석할 질문과 필요한 해상도</a:t>
+            </a:r>
+          </a:p>
+          <a:p>
+            <a:pPr/>
+            <a:r>
+              <a:t>미시 교통류 시뮬레이터: 차간거리·차로 변경을 시간 단위로 계산</a:t>
+            </a:r>
+          </a:p>
+          <a:p>
+            <a:pPr/>
+            <a:r>
+              <a:t>상용 도구 → 배차 과정을 코드로 구현하는 실습에는 부적합</a:t>
+            </a:r>
+          </a:p>
+          <a:p>
+            <a:pPr/>
+            <a:r>
+              <a:t>SUMO: TraCI로 실행 중 차량 제어, 수요응답 모의도 가능</a:t>
+            </a:r>
+          </a:p>
+        </p:txBody>
+      </p:sp>
+      <p:sp>
+        <p:nvSpPr>
+          <p:cNvPr id="5" name="Text Placeholder 4"/>
+          <p:cNvSpPr>
+            <a:spLocks noGrp="1"/>
+          </p:cNvSpPr>
+          <p:nvPr>
+            <p:ph type="body" idx="103"/>
+          </p:nvPr>
+        </p:nvSpPr>
+        <p:spPr/>
+        <p:txBody>
+          <a:bodyPr/>
+          <a:lstStyle/>
+          <a:p>
+            <a:r>
+              <a:t>표 3. 세 도구의 기본 단위와 분석에 적합한 질문</a:t>
             </a:r>
           </a:p>
         </p:txBody>
@@ -5757,7 +5988,7 @@
 </p:sld>
 </file>
 
-<file path=ppt/slides/slide11.xml><?xml version="1.0" encoding="utf-8"?>
+<file path=ppt/slides/slide12.xml><?xml version="1.0" encoding="utf-8"?>
 <p:sld xmlns:a="http://schemas.openxmlformats.org/drawingml/2006/main" xmlns:p="http://schemas.openxmlformats.org/presentationml/2006/main" xmlns:r="http://schemas.openxmlformats.org/officeDocument/2006/relationships">
   <p:cSld>
     <p:spTree>
@@ -5906,118 +6137,6 @@
               <a:t>1004</a:t>
             </a:fld>
             <a:endParaRPr lang="en-US"/>
-          </a:p>
-        </p:txBody>
-      </p:sp>
-    </p:spTree>
-  </p:cSld>
-  <p:clrMapOvr>
-    <a:masterClrMapping/>
-  </p:clrMapOvr>
-</p:sld>
-</file>
-
-<file path=ppt/slides/slide12.xml><?xml version="1.0" encoding="utf-8"?>
-<p:sld xmlns:a="http://schemas.openxmlformats.org/drawingml/2006/main" xmlns:p="http://schemas.openxmlformats.org/presentationml/2006/main" xmlns:r="http://schemas.openxmlformats.org/officeDocument/2006/relationships">
-  <p:cSld>
-    <p:spTree>
-      <p:nvGrpSpPr>
-        <p:cNvPr id="1" name=""/>
-        <p:cNvGrpSpPr/>
-        <p:nvPr/>
-      </p:nvGrpSpPr>
-      <p:grpSpPr/>
-      <p:sp>
-        <p:nvSpPr>
-          <p:cNvPr id="2" name="Text Placeholder 1"/>
-          <p:cNvSpPr>
-            <a:spLocks noGrp="1"/>
-          </p:cNvSpPr>
-          <p:nvPr>
-            <p:ph type="body" idx="100"/>
-          </p:nvPr>
-        </p:nvSpPr>
-        <p:spPr/>
-        <p:txBody>
-          <a:bodyPr/>
-          <a:lstStyle/>
-          <a:p>
-            <a:r>
-              <a:t>04</a:t>
-            </a:r>
-          </a:p>
-        </p:txBody>
-      </p:sp>
-      <p:sp>
-        <p:nvSpPr>
-          <p:cNvPr id="3" name="Title 2"/>
-          <p:cNvSpPr>
-            <a:spLocks noGrp="1"/>
-          </p:cNvSpPr>
-          <p:nvPr>
-            <p:ph type="title" idx="101"/>
-          </p:nvPr>
-        </p:nvSpPr>
-        <p:spPr/>
-        <p:txBody>
-          <a:bodyPr/>
-          <a:lstStyle/>
-          <a:p>
-            <a:r>
-              <a:t>교재 1.3 답 다음에 오는 질문</a:t>
-            </a:r>
-          </a:p>
-        </p:txBody>
-      </p:sp>
-      <p:sp>
-        <p:nvSpPr>
-          <p:cNvPr id="4" name="Text Placeholder 3"/>
-          <p:cNvSpPr>
-            <a:spLocks noGrp="1"/>
-          </p:cNvSpPr>
-          <p:nvPr>
-            <p:ph type="body" idx="102"/>
-          </p:nvPr>
-        </p:nvSpPr>
-        <p:spPr/>
-        <p:txBody>
-          <a:bodyPr/>
-          <a:lstStyle/>
-          <a:p>
-            <a:pPr>
-              <a:spcAft>
-                <a:spcPts val="1000"/>
-              </a:spcAft>
-            </a:pPr>
-            <a:r>
-              <a:rPr>
-                <a:solidFill>
-                  <a:srgbClr val="AFAFAF"/>
-                </a:solidFill>
-              </a:rPr>
-              <a:t>4.1  </a:t>
-            </a:r>
-            <a:r>
-              <a:t>평균 4.1분 뒤의 분포</a:t>
-            </a:r>
-          </a:p>
-          <a:p>
-            <a:pPr>
-              <a:spcAft>
-                <a:spcPts val="1000"/>
-              </a:spcAft>
-            </a:pPr>
-            <a:r>
-              <a:rPr>
-                <a:solidFill>
-                  <a:srgbClr val="AFAFAF"/>
-                </a:solidFill>
-              </a:rPr>
-              <a:t>4.2  </a:t>
-            </a:r>
-            <a:r>
-              <a:t>차량 80대 중 태운 차 10대</a:t>
-            </a:r>
           </a:p>
         </p:txBody>
       </p:sp>
@@ -6041,12 +6160,12 @@
       <p:grpSpPr/>
       <p:sp>
         <p:nvSpPr>
-          <p:cNvPr id="2" name="Title 1"/>
-          <p:cNvSpPr>
-            <a:spLocks noGrp="1"/>
-          </p:cNvSpPr>
-          <p:nvPr>
-            <p:ph type="title" idx="100"/>
+          <p:cNvPr id="2" name="Text Placeholder 1"/>
+          <p:cNvSpPr>
+            <a:spLocks noGrp="1"/>
+          </p:cNvSpPr>
+          <p:nvPr>
+            <p:ph type="body" idx="100"/>
           </p:nvPr>
         </p:nvSpPr>
         <p:spPr/>
@@ -6055,19 +6174,19 @@
           <a:lstStyle/>
           <a:p>
             <a:r>
-              <a:t>4.1 평균 4.1분 뒤의 분포</a:t>
-            </a:r>
-          </a:p>
-        </p:txBody>
-      </p:sp>
-      <p:sp>
-        <p:nvSpPr>
-          <p:cNvPr id="3" name="Text Placeholder 2"/>
-          <p:cNvSpPr>
-            <a:spLocks noGrp="1"/>
-          </p:cNvSpPr>
-          <p:nvPr>
-            <p:ph type="body" idx="101"/>
+              <a:t>04</a:t>
+            </a:r>
+          </a:p>
+        </p:txBody>
+      </p:sp>
+      <p:sp>
+        <p:nvSpPr>
+          <p:cNvPr id="3" name="Title 2"/>
+          <p:cNvSpPr>
+            <a:spLocks noGrp="1"/>
+          </p:cNvSpPr>
+          <p:nvPr>
+            <p:ph type="title" idx="101"/>
           </p:nvPr>
         </p:nvSpPr>
         <p:spPr/>
@@ -6076,7 +6195,7 @@
           <a:lstStyle/>
           <a:p>
             <a:r>
-              <a:t>4. 교재 1.3 답 다음에 오는 질문</a:t>
+              <a:t>교재 1.3 답 다음에 오는 질문</a:t>
             </a:r>
           </a:p>
         </p:txBody>
@@ -6096,33 +6215,69 @@
           <a:bodyPr/>
           <a:lstStyle/>
           <a:p>
-            <a:pPr/>
-            <a:r>
-              <a:t>호출 990건 전부 배차 (서비스율 1.0)</a:t>
-            </a:r>
-          </a:p>
-          <a:p>
-            <a:pPr/>
-            <a:r>
-              <a:t>평균 4.1분 — 오래 기다리지 않은 것으로 보이는 값</a:t>
-            </a:r>
-          </a:p>
-          <a:p>
-            <a:pPr/>
-            <a:r>
-              <a:t>평균 하나로는 41분 기다린 승객이 보이지 않음</a:t>
-            </a:r>
-          </a:p>
-        </p:txBody>
-      </p:sp>
-      <p:sp>
-        <p:nvSpPr>
-          <p:cNvPr id="5" name="Text Placeholder 4"/>
-          <p:cNvSpPr>
-            <a:spLocks noGrp="1"/>
-          </p:cNvSpPr>
-          <p:nvPr>
-            <p:ph type="body" idx="103"/>
+            <a:pPr>
+              <a:spcAft>
+                <a:spcPts val="1000"/>
+              </a:spcAft>
+            </a:pPr>
+            <a:r>
+              <a:rPr>
+                <a:solidFill>
+                  <a:srgbClr val="AFAFAF"/>
+                </a:solidFill>
+              </a:rPr>
+              <a:t>4.1  </a:t>
+            </a:r>
+            <a:r>
+              <a:t>평균 4.1분 뒤의 분포</a:t>
+            </a:r>
+          </a:p>
+          <a:p>
+            <a:pPr>
+              <a:spcAft>
+                <a:spcPts val="1000"/>
+              </a:spcAft>
+            </a:pPr>
+            <a:r>
+              <a:rPr>
+                <a:solidFill>
+                  <a:srgbClr val="AFAFAF"/>
+                </a:solidFill>
+              </a:rPr>
+              <a:t>4.2  </a:t>
+            </a:r>
+            <a:r>
+              <a:t>차량 80대 중 태운 차 10대</a:t>
+            </a:r>
+          </a:p>
+        </p:txBody>
+      </p:sp>
+    </p:spTree>
+  </p:cSld>
+  <p:clrMapOvr>
+    <a:masterClrMapping/>
+  </p:clrMapOvr>
+</p:sld>
+</file>
+
+<file path=ppt/slides/slide14.xml><?xml version="1.0" encoding="utf-8"?>
+<p:sld xmlns:a="http://schemas.openxmlformats.org/drawingml/2006/main" xmlns:p="http://schemas.openxmlformats.org/presentationml/2006/main" xmlns:r="http://schemas.openxmlformats.org/officeDocument/2006/relationships">
+  <p:cSld>
+    <p:spTree>
+      <p:nvGrpSpPr>
+        <p:cNvPr id="1" name=""/>
+        <p:cNvGrpSpPr/>
+        <p:nvPr/>
+      </p:nvGrpSpPr>
+      <p:grpSpPr/>
+      <p:sp>
+        <p:nvSpPr>
+          <p:cNvPr id="2" name="Title 1"/>
+          <p:cNvSpPr>
+            <a:spLocks noGrp="1"/>
+          </p:cNvSpPr>
+          <p:nvPr>
+            <p:ph type="title" idx="100"/>
           </p:nvPr>
         </p:nvSpPr>
         <p:spPr/>
@@ -6131,7 +6286,83 @@
           <a:lstStyle/>
           <a:p>
             <a:r>
-              <a:t>표 3. 하남시 18:00–24:00, 택시 80대 시뮬레이션의 대기시간</a:t>
+              <a:t>4.1 평균 4.1분 뒤의 분포</a:t>
+            </a:r>
+          </a:p>
+        </p:txBody>
+      </p:sp>
+      <p:sp>
+        <p:nvSpPr>
+          <p:cNvPr id="3" name="Text Placeholder 2"/>
+          <p:cNvSpPr>
+            <a:spLocks noGrp="1"/>
+          </p:cNvSpPr>
+          <p:nvPr>
+            <p:ph type="body" idx="101"/>
+          </p:nvPr>
+        </p:nvSpPr>
+        <p:spPr/>
+        <p:txBody>
+          <a:bodyPr/>
+          <a:lstStyle/>
+          <a:p>
+            <a:r>
+              <a:t>4. 교재 1.3 답 다음에 오는 질문</a:t>
+            </a:r>
+          </a:p>
+        </p:txBody>
+      </p:sp>
+      <p:sp>
+        <p:nvSpPr>
+          <p:cNvPr id="4" name="Text Placeholder 3"/>
+          <p:cNvSpPr>
+            <a:spLocks noGrp="1"/>
+          </p:cNvSpPr>
+          <p:nvPr>
+            <p:ph type="body" idx="102"/>
+          </p:nvPr>
+        </p:nvSpPr>
+        <p:spPr/>
+        <p:txBody>
+          <a:bodyPr/>
+          <a:lstStyle/>
+          <a:p>
+            <a:pPr/>
+            <a:r>
+              <a:t>호출 990건 전부 배차 (서비스율 1.0)</a:t>
+            </a:r>
+          </a:p>
+          <a:p>
+            <a:pPr/>
+            <a:r>
+              <a:t>평균 4.1분 — 오래 기다리지 않은 것으로 보이는 값</a:t>
+            </a:r>
+          </a:p>
+          <a:p>
+            <a:pPr/>
+            <a:r>
+              <a:t>평균 하나로는 41분 기다린 승객이 보이지 않음</a:t>
+            </a:r>
+          </a:p>
+        </p:txBody>
+      </p:sp>
+      <p:sp>
+        <p:nvSpPr>
+          <p:cNvPr id="5" name="Text Placeholder 4"/>
+          <p:cNvSpPr>
+            <a:spLocks noGrp="1"/>
+          </p:cNvSpPr>
+          <p:nvPr>
+            <p:ph type="body" idx="103"/>
+          </p:nvPr>
+        </p:nvSpPr>
+        <p:spPr/>
+        <p:txBody>
+          <a:bodyPr/>
+          <a:lstStyle/>
+          <a:p>
+            <a:r>
+              <a:t>표 4. 하남시 18:00–24:00, 택시 80대 시뮬레이션의 대기시간</a:t>
             </a:r>
           </a:p>
         </p:txBody>
@@ -6584,7 +6815,7 @@
 </p:sld>
 </file>
 
-<file path=ppt/slides/slide14.xml><?xml version="1.0" encoding="utf-8"?>
+<file path=ppt/slides/slide15.xml><?xml version="1.0" encoding="utf-8"?>
 <p:sld xmlns:a="http://schemas.openxmlformats.org/drawingml/2006/main" xmlns:p="http://schemas.openxmlformats.org/presentationml/2006/main" xmlns:r="http://schemas.openxmlformats.org/officeDocument/2006/relationships">
   <p:cSld>
     <p:spTree>
@@ -6732,7 +6963,7 @@
 </p:sld>
 </file>
 
-<file path=ppt/slides/slide15.xml><?xml version="1.0" encoding="utf-8"?>
+<file path=ppt/slides/slide16.xml><?xml version="1.0" encoding="utf-8"?>
 <p:sld xmlns:a="http://schemas.openxmlformats.org/drawingml/2006/main" xmlns:p="http://schemas.openxmlformats.org/presentationml/2006/main" xmlns:r="http://schemas.openxmlformats.org/officeDocument/2006/relationships">
   <p:cSld>
     <p:spTree>
@@ -6844,7 +7075,7 @@
 </p:sld>
 </file>
 
-<file path=ppt/slides/slide16.xml><?xml version="1.0" encoding="utf-8"?>
+<file path=ppt/slides/slide17.xml><?xml version="1.0" encoding="utf-8"?>
 <p:sld xmlns:a="http://schemas.openxmlformats.org/drawingml/2006/main" xmlns:p="http://schemas.openxmlformats.org/presentationml/2006/main" xmlns:r="http://schemas.openxmlformats.org/officeDocument/2006/relationships">
   <p:cSld>
     <p:spTree>
@@ -7031,7 +7262,7 @@
 </p:sld>
 </file>
 
-<file path=ppt/slides/slide17.xml><?xml version="1.0" encoding="utf-8"?>
+<file path=ppt/slides/slide18.xml><?xml version="1.0" encoding="utf-8"?>
 <p:sld xmlns:a="http://schemas.openxmlformats.org/drawingml/2006/main" xmlns:p="http://schemas.openxmlformats.org/presentationml/2006/main" xmlns:r="http://schemas.openxmlformats.org/officeDocument/2006/relationships">
   <p:cSld>
     <p:spTree>
@@ -7099,7 +7330,7 @@
           <a:lstStyle/>
           <a:p>
             <a:r>
-              <a:t>표 4. 시뮬레이터의 각 구성요소와 그것을 다루는 장</a:t>
+              <a:t>표 5. 시뮬레이터의 각 구성요소와 그것을 다루는 장</a:t>
             </a:r>
           </a:p>
         </p:txBody>
@@ -7841,118 +8072,6 @@
 </p:sld>
 </file>
 
-<file path=ppt/slides/slide18.xml><?xml version="1.0" encoding="utf-8"?>
-<p:sld xmlns:a="http://schemas.openxmlformats.org/drawingml/2006/main" xmlns:p="http://schemas.openxmlformats.org/presentationml/2006/main" xmlns:r="http://schemas.openxmlformats.org/officeDocument/2006/relationships">
-  <p:cSld>
-    <p:spTree>
-      <p:nvGrpSpPr>
-        <p:cNvPr id="1" name=""/>
-        <p:cNvGrpSpPr/>
-        <p:nvPr/>
-      </p:nvGrpSpPr>
-      <p:grpSpPr/>
-      <p:sp>
-        <p:nvSpPr>
-          <p:cNvPr id="2" name="Text Placeholder 1"/>
-          <p:cNvSpPr>
-            <a:spLocks noGrp="1"/>
-          </p:cNvSpPr>
-          <p:nvPr>
-            <p:ph type="body" idx="100"/>
-          </p:nvPr>
-        </p:nvSpPr>
-        <p:spPr/>
-        <p:txBody>
-          <a:bodyPr/>
-          <a:lstStyle/>
-          <a:p>
-            <a:r>
-              <a:t>06</a:t>
-            </a:r>
-          </a:p>
-        </p:txBody>
-      </p:sp>
-      <p:sp>
-        <p:nvSpPr>
-          <p:cNvPr id="3" name="Title 2"/>
-          <p:cNvSpPr>
-            <a:spLocks noGrp="1"/>
-          </p:cNvSpPr>
-          <p:nvPr>
-            <p:ph type="title" idx="101"/>
-          </p:nvPr>
-        </p:nvSpPr>
-        <p:spPr/>
-        <p:txBody>
-          <a:bodyPr/>
-          <a:lstStyle/>
-          <a:p>
-            <a:r>
-              <a:t>정리와 연습</a:t>
-            </a:r>
-          </a:p>
-        </p:txBody>
-      </p:sp>
-      <p:sp>
-        <p:nvSpPr>
-          <p:cNvPr id="4" name="Text Placeholder 3"/>
-          <p:cNvSpPr>
-            <a:spLocks noGrp="1"/>
-          </p:cNvSpPr>
-          <p:nvPr>
-            <p:ph type="body" idx="102"/>
-          </p:nvPr>
-        </p:nvSpPr>
-        <p:spPr/>
-        <p:txBody>
-          <a:bodyPr/>
-          <a:lstStyle/>
-          <a:p>
-            <a:pPr>
-              <a:spcAft>
-                <a:spcPts val="1000"/>
-              </a:spcAft>
-            </a:pPr>
-            <a:r>
-              <a:rPr>
-                <a:solidFill>
-                  <a:srgbClr val="AFAFAF"/>
-                </a:solidFill>
-              </a:rPr>
-              <a:t>6.1  </a:t>
-            </a:r>
-            <a:r>
-              <a:t>오늘의 정리</a:t>
-            </a:r>
-          </a:p>
-          <a:p>
-            <a:pPr>
-              <a:spcAft>
-                <a:spcPts val="1000"/>
-              </a:spcAft>
-            </a:pPr>
-            <a:r>
-              <a:rPr>
-                <a:solidFill>
-                  <a:srgbClr val="AFAFAF"/>
-                </a:solidFill>
-              </a:rPr>
-              <a:t>6.2  </a:t>
-            </a:r>
-            <a:r>
-              <a:t>연습과 다음 장</a:t>
-            </a:r>
-          </a:p>
-        </p:txBody>
-      </p:sp>
-    </p:spTree>
-  </p:cSld>
-  <p:clrMapOvr>
-    <a:masterClrMapping/>
-  </p:clrMapOvr>
-</p:sld>
-</file>
-
 <file path=ppt/slides/slide19.xml><?xml version="1.0" encoding="utf-8"?>
 <p:sld xmlns:a="http://schemas.openxmlformats.org/drawingml/2006/main" xmlns:p="http://schemas.openxmlformats.org/presentationml/2006/main" xmlns:r="http://schemas.openxmlformats.org/officeDocument/2006/relationships">
   <p:cSld>
@@ -7965,12 +8084,12 @@
       <p:grpSpPr/>
       <p:sp>
         <p:nvSpPr>
-          <p:cNvPr id="2" name="Title 1"/>
-          <p:cNvSpPr>
-            <a:spLocks noGrp="1"/>
-          </p:cNvSpPr>
-          <p:nvPr>
-            <p:ph type="title" idx="100"/>
+          <p:cNvPr id="2" name="Text Placeholder 1"/>
+          <p:cNvSpPr>
+            <a:spLocks noGrp="1"/>
+          </p:cNvSpPr>
+          <p:nvPr>
+            <p:ph type="body" idx="100"/>
           </p:nvPr>
         </p:nvSpPr>
         <p:spPr/>
@@ -7979,19 +8098,19 @@
           <a:lstStyle/>
           <a:p>
             <a:r>
-              <a:t>6.1 오늘의 정리</a:t>
-            </a:r>
-          </a:p>
-        </p:txBody>
-      </p:sp>
-      <p:sp>
-        <p:nvSpPr>
-          <p:cNvPr id="3" name="Text Placeholder 2"/>
-          <p:cNvSpPr>
-            <a:spLocks noGrp="1"/>
-          </p:cNvSpPr>
-          <p:nvPr>
-            <p:ph type="body" idx="101"/>
+              <a:t>06</a:t>
+            </a:r>
+          </a:p>
+        </p:txBody>
+      </p:sp>
+      <p:sp>
+        <p:nvSpPr>
+          <p:cNvPr id="3" name="Title 2"/>
+          <p:cNvSpPr>
+            <a:spLocks noGrp="1"/>
+          </p:cNvSpPr>
+          <p:nvPr>
+            <p:ph type="title" idx="101"/>
           </p:nvPr>
         </p:nvSpPr>
         <p:spPr/>
@@ -8000,7 +8119,7 @@
           <a:lstStyle/>
           <a:p>
             <a:r>
-              <a:t>6. 정리와 연습</a:t>
+              <a:t>정리와 연습</a:t>
             </a:r>
           </a:p>
         </p:txBody>
@@ -8020,82 +8139,40 @@
           <a:bodyPr/>
           <a:lstStyle/>
           <a:p>
-            <a:pPr/>
-            <a:r>
-              <a:t>시뮬레이터: 같은 하루를 조건만 바꿔 반복 실행하는 장치</a:t>
-            </a:r>
-          </a:p>
-          <a:p>
-            <a:pPr lvl="1"/>
-            <a:r>
-              <a:t>이 책은 차로 변경을 생략하고 호출 발생·배차·차량 이동을 직접 구현</a:t>
-            </a:r>
-          </a:p>
-          <a:p>
-            <a:pPr/>
-            <a:r>
-              <a:t>평균 뒤의 분포 확인 — 평균 4.1분, 최댓값 41분</a:t>
-            </a:r>
-          </a:p>
-          <a:p>
-            <a:pPr lvl="1"/>
-            <a:r>
-              <a:t>80대 중 태운 차 평균 10대, 빈 차 31대</a:t>
-            </a:r>
-          </a:p>
-          <a:p>
-            <a:pPr/>
-            <a:r>
-              <a:t>네 단계와 구성요소를 2장부터 12장까지 나누어 진행</a:t>
-            </a:r>
-          </a:p>
-        </p:txBody>
-      </p:sp>
-      <p:sp>
-        <p:nvSpPr>
-          <p:cNvPr id="25" name="Slide Number Placeholder 0"/>
-          <p:cNvSpPr>
-            <a:spLocks noGrp="1"/>
-          </p:cNvSpPr>
-          <p:nvPr>
-            <p:ph type="sldNum" sz="quarter" idx="4294967295"/>
-          </p:nvPr>
-        </p:nvSpPr>
-        <p:spPr>
-          <a:xfrm>
-            <a:off x="10591495" y="6355080"/>
-            <a:ext cx="914400" cy="274320"/>
-          </a:xfrm>
-          <a:prstGeom prst="rect">
-            <a:avLst/>
-          </a:prstGeom>
-          <a:extLst>
-            <a:ext uri="{C572A759-6A51-4108-AA02-DFA0A04FC94B}">
-              <ma14:wrappingTextBoxFlag xmlns:ma14="http://schemas.microsoft.com/office/mac/drawingml/2011/main" val="0"/>
-            </a:ext>
-          </a:extLst>
-        </p:spPr>
-        <p:txBody>
-          <a:bodyPr/>
-          <a:lstStyle>
-            <a:lvl1pPr>
-              <a:defRPr sz="1000">
+            <a:pPr>
+              <a:spcAft>
+                <a:spcPts val="1000"/>
+              </a:spcAft>
+            </a:pPr>
+            <a:r>
+              <a:rPr>
                 <a:solidFill>
                   <a:srgbClr val="AFAFAF"/>
                 </a:solidFill>
-                <a:latin typeface="Pretendard Medium"/>
-                <a:ea typeface="Pretendard Medium"/>
-                <a:cs typeface="Pretendard Medium"/>
-              </a:defRPr>
-            </a:lvl1pPr>
-          </a:lstStyle>
-          <a:p>
-            <a:pPr algn="r"/>
-            <a:fld id="{F7021451-1387-4CA6-816F-3879F97B5CBC}" type="slidenum">
-              <a:rPr b="0" lang="en-US"/>
-              <a:t>1004</a:t>
-            </a:fld>
-            <a:endParaRPr lang="en-US"/>
+              </a:rPr>
+              <a:t>6.1  </a:t>
+            </a:r>
+            <a:r>
+              <a:t>오늘의 정리</a:t>
+            </a:r>
+          </a:p>
+          <a:p>
+            <a:pPr>
+              <a:spcAft>
+                <a:spcPts val="1000"/>
+              </a:spcAft>
+            </a:pPr>
+            <a:r>
+              <a:rPr>
+                <a:solidFill>
+                  <a:srgbClr val="AFAFAF"/>
+                </a:solidFill>
+              </a:rPr>
+              <a:t>6.2  </a:t>
+            </a:r>
+            <a:r>
+              <a:t>연습과 다음 장</a:t>
+            </a:r>
           </a:p>
         </p:txBody>
       </p:sp>
@@ -8267,7 +8344,7 @@
                           </a:solidFill>
                           <a:latin typeface="Pretendard Medium"/>
                         </a:rPr>
-                        <a:t>1.1 하남시 심야 버스 20대  ·  1.2 학습 목표</a:t>
+                        <a:t>1.1 하남시 심야 버스 20대  ·  1.2 학습 목표  ·  1.3 교재와 실습을 여는 곳</a:t>
                       </a:r>
                     </a:p>
                   </a:txBody>
@@ -8928,7 +9005,7 @@
           <a:lstStyle/>
           <a:p>
             <a:r>
-              <a:t>6.2 연습과 다음 장</a:t>
+              <a:t>6.1 오늘의 정리</a:t>
             </a:r>
           </a:p>
         </p:txBody>
@@ -8971,31 +9048,31 @@
           <a:p>
             <a:pPr/>
             <a:r>
-              <a:t>연습 1.1 ★ — 10분 초과 대기 승객의 호출 시각 분포</a:t>
+              <a:t>시뮬레이터: 같은 하루를 조건만 바꿔 반복 실행하는 장치</a:t>
             </a:r>
           </a:p>
           <a:p>
             <a:pPr lvl="1"/>
             <a:r>
-              <a:t>산출물: 히스토그램 1장, 해석 2~3줄</a:t>
+              <a:t>이 책은 차로 변경을 생략하고 호출 발생·배차·차량 이동을 직접 구현</a:t>
             </a:r>
           </a:p>
           <a:p>
             <a:pPr/>
             <a:r>
-              <a:t>연습 1.2 ★★ — 승객·운영자·도시 관점별 지표 1개씩 정의</a:t>
+              <a:t>평균 뒤의 분포 확인 — 평균 4.1분, 최댓값 41분</a:t>
             </a:r>
           </a:p>
           <a:p>
             <a:pPr lvl="1"/>
             <a:r>
-              <a:t>산출물: 지표 3개, 각각 세 문장</a:t>
+              <a:t>80대 중 태운 차 평균 10대, 빈 차 31대</a:t>
             </a:r>
           </a:p>
           <a:p>
             <a:pPr/>
             <a:r>
-              <a:t>다음 장: 2장 도로망 데이터 — 데이터 준비 단계의 첫 자료</a:t>
+              <a:t>네 단계와 구성요소를 2장부터 12장까지 나누어 진행</a:t>
             </a:r>
           </a:p>
         </p:txBody>
@@ -9082,6 +9159,160 @@
           <a:lstStyle/>
           <a:p>
             <a:r>
+              <a:t>6.2 연습과 다음 장</a:t>
+            </a:r>
+          </a:p>
+        </p:txBody>
+      </p:sp>
+      <p:sp>
+        <p:nvSpPr>
+          <p:cNvPr id="3" name="Text Placeholder 2"/>
+          <p:cNvSpPr>
+            <a:spLocks noGrp="1"/>
+          </p:cNvSpPr>
+          <p:nvPr>
+            <p:ph type="body" idx="101"/>
+          </p:nvPr>
+        </p:nvSpPr>
+        <p:spPr/>
+        <p:txBody>
+          <a:bodyPr/>
+          <a:lstStyle/>
+          <a:p>
+            <a:r>
+              <a:t>6. 정리와 연습</a:t>
+            </a:r>
+          </a:p>
+        </p:txBody>
+      </p:sp>
+      <p:sp>
+        <p:nvSpPr>
+          <p:cNvPr id="4" name="Text Placeholder 3"/>
+          <p:cNvSpPr>
+            <a:spLocks noGrp="1"/>
+          </p:cNvSpPr>
+          <p:nvPr>
+            <p:ph type="body" idx="102"/>
+          </p:nvPr>
+        </p:nvSpPr>
+        <p:spPr/>
+        <p:txBody>
+          <a:bodyPr/>
+          <a:lstStyle/>
+          <a:p>
+            <a:pPr/>
+            <a:r>
+              <a:t>연습 1.1 ★ — 10분 초과 대기 승객의 호출 시각 분포</a:t>
+            </a:r>
+          </a:p>
+          <a:p>
+            <a:pPr lvl="1"/>
+            <a:r>
+              <a:t>산출물: 히스토그램 1장, 해석 2~3줄</a:t>
+            </a:r>
+          </a:p>
+          <a:p>
+            <a:pPr/>
+            <a:r>
+              <a:t>연습 1.2 ★★ — 승객·운영자·도시 관점별 지표 1개씩 정의</a:t>
+            </a:r>
+          </a:p>
+          <a:p>
+            <a:pPr lvl="1"/>
+            <a:r>
+              <a:t>산출물: 지표 3개, 각각 세 문장</a:t>
+            </a:r>
+          </a:p>
+          <a:p>
+            <a:pPr/>
+            <a:r>
+              <a:t>다음 장: 2장 도로망 데이터 — 데이터 준비 단계의 첫 자료</a:t>
+            </a:r>
+          </a:p>
+        </p:txBody>
+      </p:sp>
+      <p:sp>
+        <p:nvSpPr>
+          <p:cNvPr id="25" name="Slide Number Placeholder 0"/>
+          <p:cNvSpPr>
+            <a:spLocks noGrp="1"/>
+          </p:cNvSpPr>
+          <p:nvPr>
+            <p:ph type="sldNum" sz="quarter" idx="4294967295"/>
+          </p:nvPr>
+        </p:nvSpPr>
+        <p:spPr>
+          <a:xfrm>
+            <a:off x="10591495" y="6355080"/>
+            <a:ext cx="914400" cy="274320"/>
+          </a:xfrm>
+          <a:prstGeom prst="rect">
+            <a:avLst/>
+          </a:prstGeom>
+          <a:extLst>
+            <a:ext uri="{C572A759-6A51-4108-AA02-DFA0A04FC94B}">
+              <ma14:wrappingTextBoxFlag xmlns:ma14="http://schemas.microsoft.com/office/mac/drawingml/2011/main" val="0"/>
+            </a:ext>
+          </a:extLst>
+        </p:spPr>
+        <p:txBody>
+          <a:bodyPr/>
+          <a:lstStyle>
+            <a:lvl1pPr>
+              <a:defRPr sz="1000">
+                <a:solidFill>
+                  <a:srgbClr val="AFAFAF"/>
+                </a:solidFill>
+                <a:latin typeface="Pretendard Medium"/>
+                <a:ea typeface="Pretendard Medium"/>
+                <a:cs typeface="Pretendard Medium"/>
+              </a:defRPr>
+            </a:lvl1pPr>
+          </a:lstStyle>
+          <a:p>
+            <a:pPr algn="r"/>
+            <a:fld id="{F7021451-1387-4CA6-816F-3879F97B5CBC}" type="slidenum">
+              <a:rPr b="0" lang="en-US"/>
+              <a:t>1004</a:t>
+            </a:fld>
+            <a:endParaRPr lang="en-US"/>
+          </a:p>
+        </p:txBody>
+      </p:sp>
+    </p:spTree>
+  </p:cSld>
+  <p:clrMapOvr>
+    <a:masterClrMapping/>
+  </p:clrMapOvr>
+</p:sld>
+</file>
+
+<file path=ppt/slides/slide22.xml><?xml version="1.0" encoding="utf-8"?>
+<p:sld xmlns:a="http://schemas.openxmlformats.org/drawingml/2006/main" xmlns:p="http://schemas.openxmlformats.org/presentationml/2006/main" xmlns:r="http://schemas.openxmlformats.org/officeDocument/2006/relationships">
+  <p:cSld>
+    <p:spTree>
+      <p:nvGrpSpPr>
+        <p:cNvPr id="1" name=""/>
+        <p:cNvGrpSpPr/>
+        <p:nvPr/>
+      </p:nvGrpSpPr>
+      <p:grpSpPr/>
+      <p:sp>
+        <p:nvSpPr>
+          <p:cNvPr id="2" name="Title 1"/>
+          <p:cNvSpPr>
+            <a:spLocks noGrp="1"/>
+          </p:cNvSpPr>
+          <p:nvPr>
+            <p:ph type="title" idx="100"/>
+          </p:nvPr>
+        </p:nvSpPr>
+        <p:spPr/>
+        <p:txBody>
+          <a:bodyPr/>
+          <a:lstStyle/>
+          <a:p>
+            <a:r>
               <a:t>수요일에 봅니다</a:t>
             </a:r>
           </a:p>
@@ -9239,6 +9470,24 @@
               <a:t>학습 목표</a:t>
             </a:r>
           </a:p>
+          <a:p>
+            <a:pPr>
+              <a:spcAft>
+                <a:spcPts val="1000"/>
+              </a:spcAft>
+            </a:pPr>
+            <a:r>
+              <a:rPr>
+                <a:solidFill>
+                  <a:srgbClr val="AFAFAF"/>
+                </a:solidFill>
+              </a:rPr>
+              <a:t>1.3  </a:t>
+            </a:r>
+            <a:r>
+              <a:t>교재와 실습을 여는 곳</a:t>
+            </a:r>
+          </a:p>
         </p:txBody>
       </p:sp>
     </p:spTree>
@@ -9563,12 +9812,12 @@
       <p:grpSpPr/>
       <p:sp>
         <p:nvSpPr>
-          <p:cNvPr id="2" name="Text Placeholder 1"/>
-          <p:cNvSpPr>
-            <a:spLocks noGrp="1"/>
-          </p:cNvSpPr>
-          <p:nvPr>
-            <p:ph type="body" idx="100"/>
+          <p:cNvPr id="2" name="Title 1"/>
+          <p:cNvSpPr>
+            <a:spLocks noGrp="1"/>
+          </p:cNvSpPr>
+          <p:nvPr>
+            <p:ph type="title" idx="100"/>
           </p:nvPr>
         </p:nvSpPr>
         <p:spPr/>
@@ -9577,19 +9826,19 @@
           <a:lstStyle/>
           <a:p>
             <a:r>
-              <a:t>02</a:t>
-            </a:r>
-          </a:p>
-        </p:txBody>
-      </p:sp>
-      <p:sp>
-        <p:nvSpPr>
-          <p:cNvPr id="3" name="Title 2"/>
-          <p:cNvSpPr>
-            <a:spLocks noGrp="1"/>
-          </p:cNvSpPr>
-          <p:nvPr>
-            <p:ph type="title" idx="101"/>
+              <a:t>1.3 교재와 실습을 여는 곳</a:t>
+            </a:r>
+          </a:p>
+        </p:txBody>
+      </p:sp>
+      <p:sp>
+        <p:nvSpPr>
+          <p:cNvPr id="3" name="Text Placeholder 2"/>
+          <p:cNvSpPr>
+            <a:spLocks noGrp="1"/>
+          </p:cNvSpPr>
+          <p:nvPr>
+            <p:ph type="body" idx="101"/>
           </p:nvPr>
         </p:nvSpPr>
         <p:spPr/>
@@ -9598,7 +9847,7 @@
           <a:lstStyle/>
           <a:p>
             <a:r>
-              <a:t>교재 1.1 좋은 모빌리티 시스템</a:t>
+              <a:t>1. 도입과 학습 목표</a:t>
             </a:r>
           </a:p>
         </p:txBody>
@@ -9618,22 +9867,335 @@
           <a:bodyPr/>
           <a:lstStyle/>
           <a:p>
-            <a:pPr>
-              <a:spcAft>
-                <a:spcPts val="1000"/>
-              </a:spcAft>
-            </a:pPr>
-            <a:r>
-              <a:rPr>
+            <a:pPr/>
+            <a:r>
+              <a:t>저장소: github.com/jihoyeo/mobility-simulation-book — blob/main 아래 경로</a:t>
+            </a:r>
+          </a:p>
+          <a:p>
+            <a:pPr/>
+            <a:r>
+              <a:t>노트북 실행: jupyter lab labs/ch01_why.ipynb</a:t>
+            </a:r>
+          </a:p>
+          <a:p>
+            <a:pPr/>
+            <a:r>
+              <a:t>진행 순서: 슬라이드 개요 → 교재 본문 → 실습 노트북</a:t>
+            </a:r>
+          </a:p>
+        </p:txBody>
+      </p:sp>
+      <p:sp>
+        <p:nvSpPr>
+          <p:cNvPr id="5" name="Text Placeholder 4"/>
+          <p:cNvSpPr>
+            <a:spLocks noGrp="1"/>
+          </p:cNvSpPr>
+          <p:nvPr>
+            <p:ph type="body" idx="103"/>
+          </p:nvPr>
+        </p:nvSpPr>
+        <p:spPr/>
+        <p:txBody>
+          <a:bodyPr/>
+          <a:lstStyle/>
+          <a:p>
+            <a:r>
+              <a:t>표 1. 오늘 여는 파일과 경로</a:t>
+            </a:r>
+          </a:p>
+        </p:txBody>
+      </p:sp>
+      <p:graphicFrame>
+        <p:nvGraphicFramePr>
+          <p:cNvPr id="6" name="Table Placeholder 5"/>
+          <p:cNvGraphicFramePr>
+            <a:graphicFrameLocks noGrp="1"/>
+          </p:cNvGraphicFramePr>
+          <p:nvPr>
+            <p:ph type="tbl" idx="104"/>
+          </p:nvPr>
+        </p:nvGraphicFramePr>
+        <p:xfrm>
+          <a:off x="4937760" y="1828800"/>
+          <a:ext cx="6565392" cy="1676400"/>
+        </p:xfrm>
+        <a:graphic>
+          <a:graphicData uri="http://schemas.openxmlformats.org/drawingml/2006/table">
+            <a:tbl>
+              <a:tblPr firstRow="0" bandRow="0" firstCol="0" lastRow="0" lastCol="0" bandCol="0"/>
+              <a:tblGrid>
+                <a:gridCol w="3282696"/>
+                <a:gridCol w="3282696"/>
+              </a:tblGrid>
+              <a:tr h="406400">
+                <a:tc>
+                  <a:txBody>
+                    <a:bodyPr/>
+                    <a:lstStyle/>
+                    <a:p>
+                      <a:r>
+                        <a:rPr sz="1300" b="0">
+                          <a:solidFill>
+                            <a:srgbClr val="FFFFFF"/>
+                          </a:solidFill>
+                          <a:latin typeface="Pretendard Medium"/>
+                        </a:rPr>
+                        <a:t>자료</a:t>
+                      </a:r>
+                    </a:p>
+                  </a:txBody>
+                  <a:tcPr marL="101600" marR="101600" marT="76200" marB="76200" anchor="ctr">
+                    <a:solidFill>
+                      <a:srgbClr val="000000"/>
+                    </a:solidFill>
+                    <a:lnL w="0">
+                      <a:noFill/>
+                    </a:lnL>
+                    <a:lnR w="0">
+                      <a:noFill/>
+                    </a:lnR>
+                    <a:lnT w="0">
+                      <a:noFill/>
+                    </a:lnT>
+                    <a:lnB w="0">
+                      <a:noFill/>
+                    </a:lnB>
+                  </a:tcPr>
+                </a:tc>
+                <a:tc>
+                  <a:txBody>
+                    <a:bodyPr/>
+                    <a:lstStyle/>
+                    <a:p>
+                      <a:r>
+                        <a:rPr sz="1300" b="0">
+                          <a:solidFill>
+                            <a:srgbClr val="FFFFFF"/>
+                          </a:solidFill>
+                          <a:latin typeface="Pretendard Medium"/>
+                        </a:rPr>
+                        <a:t>경로</a:t>
+                      </a:r>
+                    </a:p>
+                  </a:txBody>
+                  <a:tcPr marL="101600" marR="101600" marT="76200" marB="76200" anchor="ctr">
+                    <a:solidFill>
+                      <a:srgbClr val="000000"/>
+                    </a:solidFill>
+                    <a:lnL w="0">
+                      <a:noFill/>
+                    </a:lnL>
+                    <a:lnR w="0">
+                      <a:noFill/>
+                    </a:lnR>
+                    <a:lnT w="0">
+                      <a:noFill/>
+                    </a:lnT>
+                    <a:lnB w="0">
+                      <a:noFill/>
+                    </a:lnB>
+                  </a:tcPr>
+                </a:tc>
+              </a:tr>
+              <a:tr h="635000">
+                <a:tc>
+                  <a:txBody>
+                    <a:bodyPr/>
+                    <a:lstStyle/>
+                    <a:p>
+                      <a:r>
+                        <a:rPr sz="1300" b="1">
+                          <a:solidFill>
+                            <a:srgbClr val="000000"/>
+                          </a:solidFill>
+                          <a:latin typeface="Pretendard"/>
+                        </a:rPr>
+                        <a:t>교재 원고</a:t>
+                      </a:r>
+                    </a:p>
+                  </a:txBody>
+                  <a:tcPr marL="101600" marR="101600" marT="101600" marB="101600" anchor="ctr">
+                    <a:solidFill>
+                      <a:srgbClr val="FFFFFF"/>
+                    </a:solidFill>
+                    <a:lnL w="0">
+                      <a:noFill/>
+                    </a:lnL>
+                    <a:lnR w="0">
+                      <a:noFill/>
+                    </a:lnR>
+                    <a:lnT w="0">
+                      <a:noFill/>
+                    </a:lnT>
+                    <a:lnB w="9525">
+                      <a:solidFill>
+                        <a:srgbClr val="E2E2E2"/>
+                      </a:solidFill>
+                    </a:lnB>
+                  </a:tcPr>
+                </a:tc>
+                <a:tc>
+                  <a:txBody>
+                    <a:bodyPr/>
+                    <a:lstStyle/>
+                    <a:p>
+                      <a:r>
+                        <a:rPr sz="1300" b="0">
+                          <a:solidFill>
+                            <a:srgbClr val="5E5E5E"/>
+                          </a:solidFill>
+                          <a:latin typeface="Pretendard Medium"/>
+                        </a:rPr>
+                        <a:t>ko/ch01_why.md</a:t>
+                      </a:r>
+                    </a:p>
+                  </a:txBody>
+                  <a:tcPr marL="101600" marR="101600" marT="101600" marB="101600" anchor="ctr">
+                    <a:solidFill>
+                      <a:srgbClr val="FFFFFF"/>
+                    </a:solidFill>
+                    <a:lnL w="0">
+                      <a:noFill/>
+                    </a:lnL>
+                    <a:lnR w="0">
+                      <a:noFill/>
+                    </a:lnR>
+                    <a:lnT w="0">
+                      <a:noFill/>
+                    </a:lnT>
+                    <a:lnB w="9525">
+                      <a:solidFill>
+                        <a:srgbClr val="E2E2E2"/>
+                      </a:solidFill>
+                    </a:lnB>
+                  </a:tcPr>
+                </a:tc>
+              </a:tr>
+              <a:tr h="635000">
+                <a:tc>
+                  <a:txBody>
+                    <a:bodyPr/>
+                    <a:lstStyle/>
+                    <a:p>
+                      <a:r>
+                        <a:rPr sz="1300" b="1">
+                          <a:solidFill>
+                            <a:srgbClr val="000000"/>
+                          </a:solidFill>
+                          <a:latin typeface="Pretendard"/>
+                        </a:rPr>
+                        <a:t>실습 노트북</a:t>
+                      </a:r>
+                    </a:p>
+                  </a:txBody>
+                  <a:tcPr marL="101600" marR="101600" marT="101600" marB="101600" anchor="ctr">
+                    <a:solidFill>
+                      <a:srgbClr val="FFFFFF"/>
+                    </a:solidFill>
+                    <a:lnL w="0">
+                      <a:noFill/>
+                    </a:lnL>
+                    <a:lnR w="0">
+                      <a:noFill/>
+                    </a:lnR>
+                    <a:lnT w="0">
+                      <a:noFill/>
+                    </a:lnT>
+                    <a:lnB w="9525">
+                      <a:solidFill>
+                        <a:srgbClr val="E2E2E2"/>
+                      </a:solidFill>
+                    </a:lnB>
+                  </a:tcPr>
+                </a:tc>
+                <a:tc>
+                  <a:txBody>
+                    <a:bodyPr/>
+                    <a:lstStyle/>
+                    <a:p>
+                      <a:r>
+                        <a:rPr sz="1300" b="0">
+                          <a:solidFill>
+                            <a:srgbClr val="5E5E5E"/>
+                          </a:solidFill>
+                          <a:latin typeface="Pretendard Medium"/>
+                        </a:rPr>
+                        <a:t>labs/ch01_why.ipynb</a:t>
+                      </a:r>
+                    </a:p>
+                  </a:txBody>
+                  <a:tcPr marL="101600" marR="101600" marT="101600" marB="101600" anchor="ctr">
+                    <a:solidFill>
+                      <a:srgbClr val="FFFFFF"/>
+                    </a:solidFill>
+                    <a:lnL w="0">
+                      <a:noFill/>
+                    </a:lnL>
+                    <a:lnR w="0">
+                      <a:noFill/>
+                    </a:lnR>
+                    <a:lnT w="0">
+                      <a:noFill/>
+                    </a:lnT>
+                    <a:lnB w="9525">
+                      <a:solidFill>
+                        <a:srgbClr val="E2E2E2"/>
+                      </a:solidFill>
+                    </a:lnB>
+                  </a:tcPr>
+                </a:tc>
+              </a:tr>
+            </a:tbl>
+          </a:graphicData>
+        </a:graphic>
+      </p:graphicFrame>
+      <p:sp>
+        <p:nvSpPr>
+          <p:cNvPr id="25" name="Slide Number Placeholder 0"/>
+          <p:cNvSpPr>
+            <a:spLocks noGrp="1"/>
+          </p:cNvSpPr>
+          <p:nvPr>
+            <p:ph type="sldNum" sz="quarter" idx="4294967295"/>
+          </p:nvPr>
+        </p:nvSpPr>
+        <p:spPr>
+          <a:xfrm>
+            <a:off x="10591495" y="6355080"/>
+            <a:ext cx="914400" cy="274320"/>
+          </a:xfrm>
+          <a:prstGeom prst="rect">
+            <a:avLst/>
+          </a:prstGeom>
+          <a:extLst>
+            <a:ext uri="{C572A759-6A51-4108-AA02-DFA0A04FC94B}">
+              <ma14:wrappingTextBoxFlag xmlns:ma14="http://schemas.microsoft.com/office/mac/drawingml/2011/main" val="0"/>
+            </a:ext>
+          </a:extLst>
+        </p:spPr>
+        <p:txBody>
+          <a:bodyPr/>
+          <a:lstStyle>
+            <a:lvl1pPr>
+              <a:defRPr sz="1000">
                 <a:solidFill>
                   <a:srgbClr val="AFAFAF"/>
                 </a:solidFill>
-              </a:rPr>
-              <a:t>2.1  </a:t>
-            </a:r>
-            <a:r>
-              <a:t>관점에 따라 갈리는 좋음</a:t>
-            </a:r>
+                <a:latin typeface="Pretendard Medium"/>
+                <a:ea typeface="Pretendard Medium"/>
+                <a:cs typeface="Pretendard Medium"/>
+              </a:defRPr>
+            </a:lvl1pPr>
+          </a:lstStyle>
+          <a:p>
+            <a:pPr algn="r"/>
+            <a:fld id="{F7021451-1387-4CA6-816F-3879F97B5CBC}" type="slidenum">
+              <a:rPr b="0" lang="en-US"/>
+              <a:t>1008</a:t>
+            </a:fld>
+            <a:endParaRPr lang="en-US"/>
           </a:p>
         </p:txBody>
       </p:sp>
@@ -9657,12 +10219,12 @@
       <p:grpSpPr/>
       <p:sp>
         <p:nvSpPr>
-          <p:cNvPr id="2" name="Title 1"/>
-          <p:cNvSpPr>
-            <a:spLocks noGrp="1"/>
-          </p:cNvSpPr>
-          <p:nvPr>
-            <p:ph type="title" idx="100"/>
+          <p:cNvPr id="2" name="Text Placeholder 1"/>
+          <p:cNvSpPr>
+            <a:spLocks noGrp="1"/>
+          </p:cNvSpPr>
+          <p:nvPr>
+            <p:ph type="body" idx="100"/>
           </p:nvPr>
         </p:nvSpPr>
         <p:spPr/>
@@ -9671,19 +10233,19 @@
           <a:lstStyle/>
           <a:p>
             <a:r>
-              <a:t>2.1 관점에 따라 갈리는 좋음</a:t>
-            </a:r>
-          </a:p>
-        </p:txBody>
-      </p:sp>
-      <p:sp>
-        <p:nvSpPr>
-          <p:cNvPr id="3" name="Text Placeholder 2"/>
-          <p:cNvSpPr>
-            <a:spLocks noGrp="1"/>
-          </p:cNvSpPr>
-          <p:nvPr>
-            <p:ph type="body" idx="101"/>
+              <a:t>02</a:t>
+            </a:r>
+          </a:p>
+        </p:txBody>
+      </p:sp>
+      <p:sp>
+        <p:nvSpPr>
+          <p:cNvPr id="3" name="Title 2"/>
+          <p:cNvSpPr>
+            <a:spLocks noGrp="1"/>
+          </p:cNvSpPr>
+          <p:nvPr>
+            <p:ph type="title" idx="101"/>
           </p:nvPr>
         </p:nvSpPr>
         <p:spPr/>
@@ -9692,7 +10254,7 @@
           <a:lstStyle/>
           <a:p>
             <a:r>
-              <a:t>2. 교재 1.1 좋은 모빌리티 시스템</a:t>
+              <a:t>교재 1.1 좋은 모빌리티 시스템</a:t>
             </a:r>
           </a:p>
         </p:txBody>
@@ -9712,39 +10274,51 @@
           <a:bodyPr/>
           <a:lstStyle/>
           <a:p>
-            <a:pPr/>
-            <a:r>
-              <a:t>대상: 사람과 물건의 이동에 쓰는 수단과 운영 체계</a:t>
-            </a:r>
-          </a:p>
-          <a:p>
-            <a:pPr lvl="1"/>
-            <a:r>
-              <a:t>지하철·버스·택시·자전거·도보</a:t>
-            </a:r>
-          </a:p>
-          <a:p>
-            <a:pPr/>
-            <a:r>
-              <a:t>충돌: 증차 → 대기 감소, 빈 차 증가</a:t>
-            </a:r>
-          </a:p>
-          <a:p>
-            <a:pPr/>
-            <a:r>
-              <a:t>비교 방법: 증차 10대 시 대기시간과 빈 차량 수를 함께 계산</a:t>
-            </a:r>
-          </a:p>
-        </p:txBody>
-      </p:sp>
-      <p:sp>
-        <p:nvSpPr>
-          <p:cNvPr id="5" name="Text Placeholder 4"/>
-          <p:cNvSpPr>
-            <a:spLocks noGrp="1"/>
-          </p:cNvSpPr>
-          <p:nvPr>
-            <p:ph type="body" idx="103"/>
+            <a:pPr>
+              <a:spcAft>
+                <a:spcPts val="1000"/>
+              </a:spcAft>
+            </a:pPr>
+            <a:r>
+              <a:rPr>
+                <a:solidFill>
+                  <a:srgbClr val="AFAFAF"/>
+                </a:solidFill>
+              </a:rPr>
+              <a:t>2.1  </a:t>
+            </a:r>
+            <a:r>
+              <a:t>관점에 따라 갈리는 좋음</a:t>
+            </a:r>
+          </a:p>
+        </p:txBody>
+      </p:sp>
+    </p:spTree>
+  </p:cSld>
+  <p:clrMapOvr>
+    <a:masterClrMapping/>
+  </p:clrMapOvr>
+</p:sld>
+</file>
+
+<file path=ppt/slides/slide8.xml><?xml version="1.0" encoding="utf-8"?>
+<p:sld xmlns:a="http://schemas.openxmlformats.org/drawingml/2006/main" xmlns:p="http://schemas.openxmlformats.org/presentationml/2006/main" xmlns:r="http://schemas.openxmlformats.org/officeDocument/2006/relationships">
+  <p:cSld>
+    <p:spTree>
+      <p:nvGrpSpPr>
+        <p:cNvPr id="1" name=""/>
+        <p:cNvGrpSpPr/>
+        <p:nvPr/>
+      </p:nvGrpSpPr>
+      <p:grpSpPr/>
+      <p:sp>
+        <p:nvSpPr>
+          <p:cNvPr id="2" name="Title 1"/>
+          <p:cNvSpPr>
+            <a:spLocks noGrp="1"/>
+          </p:cNvSpPr>
+          <p:nvPr>
+            <p:ph type="title" idx="100"/>
           </p:nvPr>
         </p:nvSpPr>
         <p:spPr/>
@@ -9753,7 +10327,89 @@
           <a:lstStyle/>
           <a:p>
             <a:r>
-              <a:t>표 1. 세 관점이 바라는 것과 그것을 측정하는 지표</a:t>
+              <a:t>2.1 관점에 따라 갈리는 좋음</a:t>
+            </a:r>
+          </a:p>
+        </p:txBody>
+      </p:sp>
+      <p:sp>
+        <p:nvSpPr>
+          <p:cNvPr id="3" name="Text Placeholder 2"/>
+          <p:cNvSpPr>
+            <a:spLocks noGrp="1"/>
+          </p:cNvSpPr>
+          <p:nvPr>
+            <p:ph type="body" idx="101"/>
+          </p:nvPr>
+        </p:nvSpPr>
+        <p:spPr/>
+        <p:txBody>
+          <a:bodyPr/>
+          <a:lstStyle/>
+          <a:p>
+            <a:r>
+              <a:t>2. 교재 1.1 좋은 모빌리티 시스템</a:t>
+            </a:r>
+          </a:p>
+        </p:txBody>
+      </p:sp>
+      <p:sp>
+        <p:nvSpPr>
+          <p:cNvPr id="4" name="Text Placeholder 3"/>
+          <p:cNvSpPr>
+            <a:spLocks noGrp="1"/>
+          </p:cNvSpPr>
+          <p:nvPr>
+            <p:ph type="body" idx="102"/>
+          </p:nvPr>
+        </p:nvSpPr>
+        <p:spPr/>
+        <p:txBody>
+          <a:bodyPr/>
+          <a:lstStyle/>
+          <a:p>
+            <a:pPr/>
+            <a:r>
+              <a:t>대상: 사람과 물건의 이동에 쓰는 수단과 운영 체계</a:t>
+            </a:r>
+          </a:p>
+          <a:p>
+            <a:pPr lvl="1"/>
+            <a:r>
+              <a:t>지하철·버스·택시·자전거·도보</a:t>
+            </a:r>
+          </a:p>
+          <a:p>
+            <a:pPr/>
+            <a:r>
+              <a:t>충돌: 증차 → 대기 감소, 빈 차 증가</a:t>
+            </a:r>
+          </a:p>
+          <a:p>
+            <a:pPr/>
+            <a:r>
+              <a:t>비교 방법: 증차 10대 시 대기시간과 빈 차량 수를 함께 계산</a:t>
+            </a:r>
+          </a:p>
+        </p:txBody>
+      </p:sp>
+      <p:sp>
+        <p:nvSpPr>
+          <p:cNvPr id="5" name="Text Placeholder 4"/>
+          <p:cNvSpPr>
+            <a:spLocks noGrp="1"/>
+          </p:cNvSpPr>
+          <p:nvPr>
+            <p:ph type="body" idx="103"/>
+          </p:nvPr>
+        </p:nvSpPr>
+        <p:spPr/>
+        <p:txBody>
+          <a:bodyPr/>
+          <a:lstStyle/>
+          <a:p>
+            <a:r>
+              <a:t>표 2. 세 관점이 바라는 것과 그것을 측정하는 지표</a:t>
             </a:r>
           </a:p>
         </p:txBody>
@@ -10275,136 +10931,6 @@
 </p:sld>
 </file>
 
-<file path=ppt/slides/slide8.xml><?xml version="1.0" encoding="utf-8"?>
-<p:sld xmlns:a="http://schemas.openxmlformats.org/drawingml/2006/main" xmlns:p="http://schemas.openxmlformats.org/presentationml/2006/main" xmlns:r="http://schemas.openxmlformats.org/officeDocument/2006/relationships">
-  <p:cSld>
-    <p:spTree>
-      <p:nvGrpSpPr>
-        <p:cNvPr id="1" name=""/>
-        <p:cNvGrpSpPr/>
-        <p:nvPr/>
-      </p:nvGrpSpPr>
-      <p:grpSpPr/>
-      <p:sp>
-        <p:nvSpPr>
-          <p:cNvPr id="2" name="Text Placeholder 1"/>
-          <p:cNvSpPr>
-            <a:spLocks noGrp="1"/>
-          </p:cNvSpPr>
-          <p:nvPr>
-            <p:ph type="body" idx="100"/>
-          </p:nvPr>
-        </p:nvSpPr>
-        <p:spPr/>
-        <p:txBody>
-          <a:bodyPr/>
-          <a:lstStyle/>
-          <a:p>
-            <a:r>
-              <a:t>03</a:t>
-            </a:r>
-          </a:p>
-        </p:txBody>
-      </p:sp>
-      <p:sp>
-        <p:nvSpPr>
-          <p:cNvPr id="3" name="Title 2"/>
-          <p:cNvSpPr>
-            <a:spLocks noGrp="1"/>
-          </p:cNvSpPr>
-          <p:nvPr>
-            <p:ph type="title" idx="101"/>
-          </p:nvPr>
-        </p:nvSpPr>
-        <p:spPr/>
-        <p:txBody>
-          <a:bodyPr/>
-          <a:lstStyle/>
-          <a:p>
-            <a:r>
-              <a:t>교재 1.2 시뮬레이션이 필요한 이유</a:t>
-            </a:r>
-          </a:p>
-        </p:txBody>
-      </p:sp>
-      <p:sp>
-        <p:nvSpPr>
-          <p:cNvPr id="4" name="Text Placeholder 3"/>
-          <p:cNvSpPr>
-            <a:spLocks noGrp="1"/>
-          </p:cNvSpPr>
-          <p:nvPr>
-            <p:ph type="body" idx="102"/>
-          </p:nvPr>
-        </p:nvSpPr>
-        <p:spPr/>
-        <p:txBody>
-          <a:bodyPr/>
-          <a:lstStyle/>
-          <a:p>
-            <a:pPr>
-              <a:spcAft>
-                <a:spcPts val="1000"/>
-              </a:spcAft>
-            </a:pPr>
-            <a:r>
-              <a:rPr>
-                <a:solidFill>
-                  <a:srgbClr val="AFAFAF"/>
-                </a:solidFill>
-              </a:rPr>
-              <a:t>3.1  </a:t>
-            </a:r>
-            <a:r>
-              <a:t>한 달 운영으로 얻는 것</a:t>
-            </a:r>
-          </a:p>
-          <a:p>
-            <a:pPr>
-              <a:spcAft>
-                <a:spcPts val="1000"/>
-              </a:spcAft>
-            </a:pPr>
-            <a:r>
-              <a:rPr>
-                <a:solidFill>
-                  <a:srgbClr val="AFAFAF"/>
-                </a:solidFill>
-              </a:rPr>
-              <a:t>3.2  </a:t>
-            </a:r>
-            <a:r>
-              <a:t>도구별 기본 단위와 적용 범위</a:t>
-            </a:r>
-          </a:p>
-          <a:p>
-            <a:pPr>
-              <a:spcAft>
-                <a:spcPts val="1000"/>
-              </a:spcAft>
-            </a:pPr>
-            <a:r>
-              <a:rPr>
-                <a:solidFill>
-                  <a:srgbClr val="AFAFAF"/>
-                </a:solidFill>
-              </a:rPr>
-              <a:t>3.3  </a:t>
-            </a:r>
-            <a:r>
-              <a:t>이 책 모형의 범위와 재료</a:t>
-            </a:r>
-          </a:p>
-        </p:txBody>
-      </p:sp>
-    </p:spTree>
-  </p:cSld>
-  <p:clrMapOvr>
-    <a:masterClrMapping/>
-  </p:clrMapOvr>
-</p:sld>
-</file>
-
 <file path=ppt/slides/slide9.xml><?xml version="1.0" encoding="utf-8"?>
 <p:sld xmlns:a="http://schemas.openxmlformats.org/drawingml/2006/main" xmlns:p="http://schemas.openxmlformats.org/presentationml/2006/main" xmlns:r="http://schemas.openxmlformats.org/officeDocument/2006/relationships">
   <p:cSld>
@@ -10417,12 +10943,12 @@
       <p:grpSpPr/>
       <p:sp>
         <p:nvSpPr>
-          <p:cNvPr id="2" name="Title 1"/>
-          <p:cNvSpPr>
-            <a:spLocks noGrp="1"/>
-          </p:cNvSpPr>
-          <p:nvPr>
-            <p:ph type="title" idx="100"/>
+          <p:cNvPr id="2" name="Text Placeholder 1"/>
+          <p:cNvSpPr>
+            <a:spLocks noGrp="1"/>
+          </p:cNvSpPr>
+          <p:nvPr>
+            <p:ph type="body" idx="100"/>
           </p:nvPr>
         </p:nvSpPr>
         <p:spPr/>
@@ -10431,19 +10957,19 @@
           <a:lstStyle/>
           <a:p>
             <a:r>
-              <a:t>3.1 한 달 운영으로 얻는 것</a:t>
-            </a:r>
-          </a:p>
-        </p:txBody>
-      </p:sp>
-      <p:sp>
-        <p:nvSpPr>
-          <p:cNvPr id="3" name="Text Placeholder 2"/>
-          <p:cNvSpPr>
-            <a:spLocks noGrp="1"/>
-          </p:cNvSpPr>
-          <p:nvPr>
-            <p:ph type="body" idx="101"/>
+              <a:t>03</a:t>
+            </a:r>
+          </a:p>
+        </p:txBody>
+      </p:sp>
+      <p:sp>
+        <p:nvSpPr>
+          <p:cNvPr id="3" name="Title 2"/>
+          <p:cNvSpPr>
+            <a:spLocks noGrp="1"/>
+          </p:cNvSpPr>
+          <p:nvPr>
+            <p:ph type="title" idx="101"/>
           </p:nvPr>
         </p:nvSpPr>
         <p:spPr/>
@@ -10452,7 +10978,7 @@
           <a:lstStyle/>
           <a:p>
             <a:r>
-              <a:t>3. 교재 1.2 시뮬레이션이 필요한 이유</a:t>
+              <a:t>교재 1.2 시뮬레이션이 필요한 이유</a:t>
             </a:r>
           </a:p>
         </p:txBody>
@@ -10472,88 +10998,58 @@
           <a:bodyPr/>
           <a:lstStyle/>
           <a:p>
-            <a:pPr/>
-            <a:r>
-              <a:t>실제 20대 한 달 운영 → 20대와 선택한 배차 규칙의 기록 하나</a:t>
-            </a:r>
-          </a:p>
-          <a:p>
-            <a:pPr/>
-            <a:r>
-              <a:t>그 기록으로 답하기 어려운 질문</a:t>
-            </a:r>
-          </a:p>
-          <a:p>
-            <a:pPr lvl="1"/>
-            <a:r>
-              <a:t>10대였을 때의 대기시간</a:t>
-            </a:r>
-          </a:p>
-          <a:p>
-            <a:pPr lvl="1"/>
-            <a:r>
-              <a:t>차고지 2곳 분산 배치</a:t>
-            </a:r>
-          </a:p>
-          <a:p>
-            <a:pPr/>
-            <a:r>
-              <a:t>대안 비교 조건: 같은 기간을 조건만 바꿔 재관찰 — 실제 도시에서 불가</a:t>
-            </a:r>
-          </a:p>
-          <a:p>
-            <a:pPr/>
-            <a:r>
-              <a:t>시뮬레이션: 반복 관찰을 계산으로 대체 — 1분 간격 진행</a:t>
-            </a:r>
-          </a:p>
-        </p:txBody>
-      </p:sp>
-      <p:sp>
-        <p:nvSpPr>
-          <p:cNvPr id="25" name="Slide Number Placeholder 0"/>
-          <p:cNvSpPr>
-            <a:spLocks noGrp="1"/>
-          </p:cNvSpPr>
-          <p:nvPr>
-            <p:ph type="sldNum" sz="quarter" idx="4294967295"/>
-          </p:nvPr>
-        </p:nvSpPr>
-        <p:spPr>
-          <a:xfrm>
-            <a:off x="10591495" y="6355080"/>
-            <a:ext cx="914400" cy="274320"/>
-          </a:xfrm>
-          <a:prstGeom prst="rect">
-            <a:avLst/>
-          </a:prstGeom>
-          <a:extLst>
-            <a:ext uri="{C572A759-6A51-4108-AA02-DFA0A04FC94B}">
-              <ma14:wrappingTextBoxFlag xmlns:ma14="http://schemas.microsoft.com/office/mac/drawingml/2011/main" val="0"/>
-            </a:ext>
-          </a:extLst>
-        </p:spPr>
-        <p:txBody>
-          <a:bodyPr/>
-          <a:lstStyle>
-            <a:lvl1pPr>
-              <a:defRPr sz="1000">
+            <a:pPr>
+              <a:spcAft>
+                <a:spcPts val="1000"/>
+              </a:spcAft>
+            </a:pPr>
+            <a:r>
+              <a:rPr>
                 <a:solidFill>
                   <a:srgbClr val="AFAFAF"/>
                 </a:solidFill>
-                <a:latin typeface="Pretendard Medium"/>
-                <a:ea typeface="Pretendard Medium"/>
-                <a:cs typeface="Pretendard Medium"/>
-              </a:defRPr>
-            </a:lvl1pPr>
-          </a:lstStyle>
-          <a:p>
-            <a:pPr algn="r"/>
-            <a:fld id="{F7021451-1387-4CA6-816F-3879F97B5CBC}" type="slidenum">
-              <a:rPr b="0" lang="en-US"/>
-              <a:t>1004</a:t>
-            </a:fld>
-            <a:endParaRPr lang="en-US"/>
+              </a:rPr>
+              <a:t>3.1  </a:t>
+            </a:r>
+            <a:r>
+              <a:t>한 달 운영으로 얻는 것</a:t>
+            </a:r>
+          </a:p>
+          <a:p>
+            <a:pPr>
+              <a:spcAft>
+                <a:spcPts val="1000"/>
+              </a:spcAft>
+            </a:pPr>
+            <a:r>
+              <a:rPr>
+                <a:solidFill>
+                  <a:srgbClr val="AFAFAF"/>
+                </a:solidFill>
+              </a:rPr>
+              <a:t>3.2  </a:t>
+            </a:r>
+            <a:r>
+              <a:t>도구별 기본 단위와 적용 범위</a:t>
+            </a:r>
+          </a:p>
+          <a:p>
+            <a:pPr>
+              <a:spcAft>
+                <a:spcPts val="1000"/>
+              </a:spcAft>
+            </a:pPr>
+            <a:r>
+              <a:rPr>
+                <a:solidFill>
+                  <a:srgbClr val="AFAFAF"/>
+                </a:solidFill>
+              </a:rPr>
+              <a:t>3.3  </a:t>
+            </a:r>
+            <a:r>
+              <a:t>이 책 모형의 범위와 재료</a:t>
+            </a:r>
           </a:p>
         </p:txBody>
       </p:sp>

--- a/slides/week01/ch01_why.pptx
+++ b/slides/week01/ch01_why.pptx
@@ -592,7 +592,7 @@
           <a:lstStyle/>
           <a:p>
             <a:r>
-              <a:t>이 질문에 답하려면 같은 저녁을 40대로 다시 실행해야 한다. 실제 운영에서는 불가능하고 시뮬레이터에서는 인자 하나만 변경하면 된다. 다만 교재 녹화본에는 80대 결과만 있어서 40대로 실행하려면 DTUMOS 서버가 필요하다(부록 B). 11장에서 직접 짠 루프로 답한다.</a:t>
+              <a:t>같은 저녁의 수요를 차량 40대로 다시 계산해야 두 운영안을 비교할 수 있습니다. 시뮬레이션에서는 차량 수를 나타내는 인자만 바꾸면 됩니다. 다만 교재 녹화본에는 80대 결과만 있으므로 40대로 실행하려면 DTUMOS 서버가 필요합니다. 11장에서는 직접 구현한 시뮬레이션 루프로 같은 질문을 분석합니다.</a:t>
             </a:r>
           </a:p>
         </p:txBody>
@@ -662,7 +662,7 @@
           <a:lstStyle/>
           <a:p>
             <a:r>
-              <a:t>배차 알고리즘은 각 차량이 승객에게 도착하는 데 몇 분이 걸리는지 알아야 한다. 이 값을 예상 도착시간(ETA, estimated time of arrival)이라고 한다. 직선거리만 쓰면 강 건너에 있는 차량을 가장 가깝다고 잘못 고를 수 있다. 3장에서 도로망 최단경로로, 9장에서 통행 기록으로 학습한 모형으로 구한다.</a:t>
+              <a:t>배차 알고리즘에는 각 차량이 승객에게 도착하는 데 걸리는 시간이 필요합니다. 이 값을 예상 도착시간, 즉 ETA라고 합니다. 직선거리만 사용하면 강 건너 차량을 가장 가까운 차량으로 잘못 판단할 수 있습니다. 3장에서는 도로망 최단경로로 ETA를 계산하고, 9장에서는 통행 기록으로 학습한 모형을 사용합니다.</a:t>
             </a:r>
           </a:p>
         </p:txBody>
@@ -732,7 +732,7 @@
           <a:lstStyle/>
           <a:p>
             <a:r>
-              <a:t>매주 어느 부분을 만들고 있는지 이 표로 확인시킨다. 차량 재배치 알고리즘은 이 책에서 다루지 않는다. 빈 차를 수요가 많은 곳으로 미리 옮기는 문제인데 배차와 수요 예측을 둘 다 알아야 손댈 수 있다.</a:t>
+              <a:t>매주 수업을 시작할 때 이 표에서 해당 구성요소를 확인합니다. 차량 재배치 알고리즘은 이번 학기 범위에 포함하지 않습니다. 빈 차량을 수요가 많은 지역으로 미리 이동시키는 문제로, 배차와 수요 예측을 함께 다뤄야 하기 때문입니다.</a:t>
             </a:r>
           </a:p>
         </p:txBody>
@@ -802,7 +802,7 @@
           <a:lstStyle/>
           <a:p>
             <a:r>
-              <a:t>학습 목표 네 가지에 각각 답이 나왔는지 확인한다. 마지막 항목이 다음 시간으로 이어진다.</a:t>
+              <a:t>학습 목표 네 가지에 답할 수 있는지 확인합니다. 시뮬레이터의 구성요소와 교재의 장을 연결한 뒤 다음 수업의 도로망 데이터로 이어갑니다.</a:t>
             </a:r>
           </a:p>
         </p:txBody>
@@ -872,7 +872,7 @@
           <a:lstStyle/>
           <a:p>
             <a:r>
-              <a:t>더 읽을거리는 교재 1장 끝에 있다. Lopez et al.(2018)은 TraCI 부분만, Horni et al.(2016)은 MATSim의 다른 접근을 본다.</a:t>
+              <a:t>추가 문헌은 교재 1장 끝에 정리되어 있습니다. Lopez et al.(2018)에서는 TraCI 부분을 확인하고, Horni et al.(2016)에서는 MATSim의 접근을 비교합니다.</a:t>
             </a:r>
           </a:p>
         </p:txBody>
@@ -942,7 +942,7 @@
           <a:lstStyle/>
           <a:p>
             <a:r>
-              <a:t>교재 1장 도입부. 20대를 실제로 굴리기 전에 운영안을 어떻게 비교할 수 있는지 묻고 시작한다. 답은 같은 시간대의 운영 조건만 바꿔 다시 계산하는 것이다.</a:t>
+              <a:t>교재 1장의 도입 사례입니다. 버스 20대를 실제로 운행하기 전에 여러 운영안을 어떻게 비교할 수 있는지 질문합니다. 같은 시간대의 수요를 두고 차량 배치와 배차 규칙만 바꿔 계산하는 것이 이 장에서 제시할 방법입니다.</a:t>
             </a:r>
           </a:p>
         </p:txBody>
@@ -1012,7 +1012,7 @@
           <a:lstStyle/>
           <a:p>
             <a:r>
-              <a:t>교재 1장 학습 목표와 같다. 네 가지에 각각 답이 나왔는지 마지막 정리 슬라이드에서 확인한다.</a:t>
+              <a:t>교재 1장의 학습 목표와 같습니다. 마지막 정리 슬라이드에서 네 항목에 각각 답할 수 있는지 확인합니다.</a:t>
             </a:r>
           </a:p>
         </p:txBody>
@@ -1152,7 +1152,7 @@
           <a:lstStyle/>
           <a:p>
             <a:r>
-              <a:t>12장에서 승객·운영자·도시 세 관점의 지표를 계산한다. 이 과목이 만드는 것은 결국 이 표의 오른쪽 열에 들어갈 숫자다.</a:t>
+              <a:t>12장에서는 승객·운영자·도시의 관점에서 지표를 계산합니다. 이번 학기에 만드는 시뮬레이터의 결과도 이 표의 오른쪽 열에 제시된 지표로 평가합니다.</a:t>
             </a:r>
           </a:p>
         </p:txBody>
@@ -1222,7 +1222,7 @@
           <a:lstStyle/>
           <a:p>
             <a:r>
-              <a:t>차량 위치와 승객 상태를 1분 간격으로 기록한다. 차량 수만 20대에서 10대로 바꿔 다시 실행하면 같은 수요와 같은 도로망에서 두 운영안의 대기시간을 비교할 수 있다. 비교 결과는 모형에 넣은 수요와 통행시간을 전제로 한다. 호출 시각이나 통행시간이 실제와 다르면 대기시간도 달라진다. 8장에서 수요를 만들고 9장에서 통행시간 모형을 점검한다.</a:t>
+              <a:t>차량 위치와 승객 상태를 1분 간격으로 기록합니다. 차량 수만 20대에서 10대로 바꿔 다시 계산하면 같은 수요와 도로망에서 두 운영안의 대기시간을 비교할 수 있습니다. 다만 비교 결과는 입력한 수요와 통행시간을 전제로 합니다. 호출 시각이나 통행시간이 실제와 다르면 대기시간도 달라집니다. 8장에서 수요를 만들고 9장에서 통행시간 모형을 점검합니다.</a:t>
             </a:r>
           </a:p>
         </p:txBody>
@@ -1292,7 +1292,7 @@
           <a:lstStyle/>
           <a:p>
             <a:r>
-              <a:t>VISSIM 화면은 교재 그림으로 함께 본다. 화면 전체가 교차로 하나이고 차량마다 차로 위 위치를 계산한다. 세밀하게 계산할수록 입력 자료와 계산량이 함께 늘어난다. SUMO는 이 책의 질문에도 쓸 수 있지만 기본 모형은 여전히 차로 위에서 움직이는 차량이다.</a:t>
+              <a:t>교재의 VISSIM 화면을 함께 봅니다. 화면 전체가 교차로 하나이며 차량마다 차로 위의 위치를 계산합니다. 차량 움직임을 세밀하게 표현할수록 필요한 입력 자료와 계산량도 늘어납니다. SUMO도 이 수업의 분석에 사용할 수 있지만, 기본적으로 차로 위의 개별 차량 움직임을 계산하는 도구입니다.</a:t>
             </a:r>
           </a:p>
         </p:txBody>
@@ -1362,7 +1362,7 @@
           <a:lstStyle/>
           <a:p>
             <a:r>
-              <a:t>직접 만든다고 해서 전부 새로 만드는 것은 아니다. 이 슬라이드가 학기 전체의 분담표에 해당한다.</a:t>
+              <a:t>모든 구성요소를 새로 작성하는 것은 아닙니다. 공개 데이터와 표준을 활용하되, 호출 발생부터 배차와 차량 이동까지의 연결 과정은 직접 구현합니다. 이 구분은 한 학기 동안의 구현 범위를 보여 줍니다.</a:t>
             </a:r>
           </a:p>
         </p:txBody>
@@ -1432,7 +1432,7 @@
           <a:lstStyle/>
           <a:p>
             <a:r>
-              <a:t>교재 1.3에서 sim.passengers의 대기시간 분위수를 직접 뽑는다. 평균과 분포를 함께 보는 습관이 이 과목 전체에 걸쳐 반복된다.</a:t>
+              <a:t>교재 1.3에서 sim.passengers의 대기시간 분위수를 직접 계산합니다. 평균만 보면 대부분의 승객이 비슷하게 기다린 것처럼 보이지만, 분포를 확인하면 장시간 대기 사례가 드러납니다. 이후 결과 분석에서도 평균과 분포를 함께 확인합니다.</a:t>
             </a:r>
           </a:p>
         </p:txBody>
@@ -4979,7 +4979,7 @@
           <a:lstStyle/>
           <a:p>
             <a:r>
-              <a:t>왜 시뮬레이션인가</a:t>
+              <a:t>시뮬레이션의 필요성과 구조</a:t>
             </a:r>
           </a:p>
         </p:txBody>
@@ -5081,7 +5081,7 @@
           <a:lstStyle/>
           <a:p>
             <a:r>
-              <a:t>3.1 한 달 운영으로 얻는 것</a:t>
+              <a:t>3.1 실제 운영 자료의 한계</a:t>
             </a:r>
           </a:p>
         </p:txBody>
@@ -5124,7 +5124,7 @@
           <a:p>
             <a:pPr/>
             <a:r>
-              <a:t>실제 20대 한 달 운영 → 20대와 선택한 배차 규칙의 기록 하나</a:t>
+              <a:t>버스 20대의 한 달 운행 기록 → 선택한 배치와 배차 규칙의 결과 한 가지</a:t>
             </a:r>
           </a:p>
           <a:p>
@@ -5148,13 +5148,13 @@
           <a:p>
             <a:pPr/>
             <a:r>
-              <a:t>대안 비교 조건: 같은 기간을 조건만 바꿔 재관찰 — 실제 도시에서 불가</a:t>
+              <a:t>대안 비교에 필요한 조건: 같은 기간을 운영 조건만 바꿔 반복 관찰</a:t>
             </a:r>
           </a:p>
           <a:p>
             <a:pPr/>
             <a:r>
-              <a:t>시뮬레이션: 반복 관찰을 계산으로 대체 — 1분 간격 진행</a:t>
+              <a:t>시뮬레이션: 실제 반복 관찰을 1분 간격의 계산으로 대체</a:t>
             </a:r>
           </a:p>
         </p:txBody>
@@ -5296,7 +5296,7 @@
           <a:p>
             <a:pPr/>
             <a:r>
-              <a:t>상용 도구 → 배차 과정을 코드로 구현하는 실습에는 부적합</a:t>
+              <a:t>상용 도구: 배차 과정을 직접 구현하는 실습에는 제약</a:t>
             </a:r>
           </a:p>
           <a:p>
@@ -6014,7 +6014,7 @@
           <a:lstStyle/>
           <a:p>
             <a:r>
-              <a:t>3.3 이 책 모형의 범위와 재료</a:t>
+              <a:t>3.3 수업에서 구현할 모형의 범위</a:t>
             </a:r>
           </a:p>
         </p:txBody>
@@ -6057,13 +6057,13 @@
           <a:p>
             <a:pPr/>
             <a:r>
-              <a:t>생략하는 것: 차로 안에서의 차량 움직임</a:t>
+              <a:t>계산에서 제외: 차로 안의 세부 차량 움직임</a:t>
             </a:r>
           </a:p>
           <a:p>
             <a:pPr/>
             <a:r>
-              <a:t>기록하는 것: 차량이 몇 시 몇 분에 어느 노드에 있는지</a:t>
+              <a:t>직접 기록: 분 단위 차량 위치</a:t>
             </a:r>
           </a:p>
           <a:p>
@@ -6075,7 +6075,7 @@
           <a:p>
             <a:pPr/>
             <a:r>
-              <a:t>재료는 이미 공개</a:t>
+              <a:t>활용 자료와 알고리즘</a:t>
             </a:r>
           </a:p>
           <a:p>
@@ -6087,7 +6087,7 @@
           <a:p>
             <a:pPr/>
             <a:r>
-              <a:t>새로 작성: 호출 발생, 배차, 차량 이동을 처리하는 코드</a:t>
+              <a:t>직접 구현: 호출 발생, 배차, 차량 이동 처리</a:t>
             </a:r>
           </a:p>
         </p:txBody>
@@ -6195,7 +6195,7 @@
           <a:lstStyle/>
           <a:p>
             <a:r>
-              <a:t>교재 1.3 답 다음에 오는 질문</a:t>
+              <a:t>교재 1.3 시뮬레이션 결과 해석</a:t>
             </a:r>
           </a:p>
         </p:txBody>
@@ -6229,7 +6229,7 @@
               <a:t>4.1  </a:t>
             </a:r>
             <a:r>
-              <a:t>평균 4.1분 뒤의 분포</a:t>
+              <a:t>평균이 가리는 대기시간 분포</a:t>
             </a:r>
           </a:p>
           <a:p>
@@ -6247,7 +6247,7 @@
               <a:t>4.2  </a:t>
             </a:r>
             <a:r>
-              <a:t>차량 80대 중 태운 차 10대</a:t>
+              <a:t>차량 80대의 평균 운행 상태</a:t>
             </a:r>
           </a:p>
         </p:txBody>
@@ -6286,7 +6286,7 @@
           <a:lstStyle/>
           <a:p>
             <a:r>
-              <a:t>4.1 평균 4.1분 뒤의 분포</a:t>
+              <a:t>4.1 평균이 가리는 대기시간 분포</a:t>
             </a:r>
           </a:p>
         </p:txBody>
@@ -6307,7 +6307,7 @@
           <a:lstStyle/>
           <a:p>
             <a:r>
-              <a:t>4. 교재 1.3 답 다음에 오는 질문</a:t>
+              <a:t>4. 교재 1.3 시뮬레이션 결과 해석</a:t>
             </a:r>
           </a:p>
         </p:txBody>
@@ -6335,13 +6335,13 @@
           <a:p>
             <a:pPr/>
             <a:r>
-              <a:t>평균 4.1분 — 오래 기다리지 않은 것으로 보이는 값</a:t>
+              <a:t>평균 대기시간 4.1분</a:t>
             </a:r>
           </a:p>
           <a:p>
             <a:pPr/>
             <a:r>
-              <a:t>평균 하나로는 41분 기다린 승객이 보이지 않음</a:t>
+              <a:t>평균만으로는 확인하기 어려운 41분 대기 사례</a:t>
             </a:r>
           </a:p>
         </p:txBody>
@@ -6620,7 +6620,7 @@
                           </a:solidFill>
                           <a:latin typeface="Pretendard"/>
                         </a:rPr>
-                        <a:t>95% 분위</a:t>
+                        <a:t>상위 5%</a:t>
                       </a:r>
                     </a:p>
                   </a:txBody>
@@ -6694,7 +6694,7 @@
                           </a:solidFill>
                           <a:latin typeface="Pretendard"/>
                         </a:rPr>
-                        <a:t>최댓값</a:t>
+                        <a:t>최대 대기시간</a:t>
                       </a:r>
                     </a:p>
                   </a:txBody>
@@ -6841,7 +6841,7 @@
           <a:lstStyle/>
           <a:p>
             <a:r>
-              <a:t>4.2 차량 80대 중 태운 차 10대</a:t>
+              <a:t>4.2 차량 80대의 평균 운행 상태</a:t>
             </a:r>
           </a:p>
         </p:txBody>
@@ -6862,7 +6862,7 @@
           <a:lstStyle/>
           <a:p>
             <a:r>
-              <a:t>4. 교재 1.3 답 다음에 오는 질문</a:t>
+              <a:t>4. 교재 1.3 시뮬레이션 결과 해석</a:t>
             </a:r>
           </a:p>
         </p:txBody>
@@ -6884,25 +6884,25 @@
           <a:p>
             <a:pPr/>
             <a:r>
-              <a:t>시간대별 차량 상태 평균</a:t>
-            </a:r>
-          </a:p>
-          <a:p>
-            <a:pPr lvl="1"/>
-            <a:r>
-              <a:t>승객 태운 차 10대 · 빈 차 31대</a:t>
+              <a:t>승객 탑승 차량: 평균 10대</a:t>
             </a:r>
           </a:p>
           <a:p>
             <a:pPr/>
             <a:r>
-              <a:t>다음 질문: 차량 절반 감축 시 평균 대기시간과 장시간 대기 승객 수</a:t>
+              <a:t>빈 차량: 평균 31대</a:t>
             </a:r>
           </a:p>
           <a:p>
             <a:pPr/>
             <a:r>
-              <a:t>함께 볼 것: 990건 중 배차되지 못한 호출의 발생 여부</a:t>
+              <a:t>비교 질문: 차량 40대일 때 평균 대기시간과 장시간 대기 승객 수</a:t>
+            </a:r>
+          </a:p>
+          <a:p>
+            <a:pPr/>
+            <a:r>
+              <a:t>추가 확인: 990건 중 미배차 호출의 발생 여부</a:t>
             </a:r>
           </a:p>
         </p:txBody>
@@ -7156,7 +7156,7 @@
           <a:p>
             <a:pPr/>
             <a:r>
-              <a:t>각 구성요소가 이 책의 장에 대응 — 주차별 진도의 기준</a:t>
+              <a:t>각 구성요소와 교재의 장을 연결해 학기 진도 구성</a:t>
             </a:r>
           </a:p>
         </p:txBody>
@@ -8153,7 +8153,7 @@
               <a:t>6.1  </a:t>
             </a:r>
             <a:r>
-              <a:t>오늘의 정리</a:t>
+              <a:t>1장 정리</a:t>
             </a:r>
           </a:p>
           <a:p>
@@ -8308,7 +8308,7 @@
                           </a:solidFill>
                           <a:latin typeface="Pretendard"/>
                         </a:rPr>
-                        <a:t>도입과 학습 목표</a:t>
+                        <a:t>운행계획 비교</a:t>
                       </a:r>
                     </a:p>
                   </a:txBody>
@@ -8344,7 +8344,7 @@
                           </a:solidFill>
                           <a:latin typeface="Pretendard Medium"/>
                         </a:rPr>
-                        <a:t>1.1 하남시 심야 버스 20대  ·  1.2 학습 목표  ·  1.3 교재와 실습을 여는 곳</a:t>
+                        <a:t>1.1 하남시 심야버스 운영안  ·  1.2 학습 목표  ·  1.3 교재와 실습을 여는 곳</a:t>
                       </a:r>
                     </a:p>
                   </a:txBody>
@@ -8418,7 +8418,7 @@
                           </a:solidFill>
                           <a:latin typeface="Pretendard"/>
                         </a:rPr>
-                        <a:t>교재 1.1 좋은 모빌리티 시스템</a:t>
+                        <a:t>교재 1.1 모빌리티 평가 관점</a:t>
                       </a:r>
                     </a:p>
                   </a:txBody>
@@ -8454,7 +8454,7 @@
                           </a:solidFill>
                           <a:latin typeface="Pretendard Medium"/>
                         </a:rPr>
-                        <a:t>2.1 관점에 따라 갈리는 좋음</a:t>
+                        <a:t>2.1 관점별 평가 기준</a:t>
                       </a:r>
                     </a:p>
                   </a:txBody>
@@ -8564,7 +8564,7 @@
                           </a:solidFill>
                           <a:latin typeface="Pretendard Medium"/>
                         </a:rPr>
-                        <a:t>3.1 한 달 운영으로 얻는 것  ·  3.2 도구별 기본 단위와 적용 범위  ·  3.3 이 책 모형의 범위와 재료</a:t>
+                        <a:t>3.1 실제 운영 자료의 한계  ·  3.2 도구별 기본 단위와 적용 범위  ·  3.3 수업에서 구현할 모형의 범위</a:t>
                       </a:r>
                     </a:p>
                   </a:txBody>
@@ -8638,7 +8638,7 @@
                           </a:solidFill>
                           <a:latin typeface="Pretendard"/>
                         </a:rPr>
-                        <a:t>교재 1.3 답 다음에 오는 질문</a:t>
+                        <a:t>교재 1.3 시뮬레이션 결과 해석</a:t>
                       </a:r>
                     </a:p>
                   </a:txBody>
@@ -8674,7 +8674,7 @@
                           </a:solidFill>
                           <a:latin typeface="Pretendard Medium"/>
                         </a:rPr>
-                        <a:t>4.1 평균 4.1분 뒤의 분포  ·  4.2 차량 80대 중 태운 차 10대</a:t>
+                        <a:t>4.1 평균이 가리는 대기시간 분포  ·  4.2 차량 80대의 평균 운행 상태</a:t>
                       </a:r>
                     </a:p>
                   </a:txBody>
@@ -8894,7 +8894,7 @@
                           </a:solidFill>
                           <a:latin typeface="Pretendard Medium"/>
                         </a:rPr>
-                        <a:t>6.1 오늘의 정리  ·  6.2 연습과 다음 장</a:t>
+                        <a:t>6.1 1장 정리  ·  6.2 연습과 다음 장</a:t>
                       </a:r>
                     </a:p>
                   </a:txBody>
@@ -9005,7 +9005,7 @@
           <a:lstStyle/>
           <a:p>
             <a:r>
-              <a:t>6.1 오늘의 정리</a:t>
+              <a:t>6.1 1장 정리</a:t>
             </a:r>
           </a:p>
         </p:txBody>
@@ -9060,7 +9060,7 @@
           <a:p>
             <a:pPr/>
             <a:r>
-              <a:t>평균 뒤의 분포 확인 — 평균 4.1분, 최댓값 41분</a:t>
+              <a:t>평균과 분포를 함께 확인 — 평균 4.1분, 최댓값 41분</a:t>
             </a:r>
           </a:p>
           <a:p>
@@ -9415,7 +9415,7 @@
           <a:lstStyle/>
           <a:p>
             <a:r>
-              <a:t>도입과 학습 목표</a:t>
+              <a:t>운행계획 비교</a:t>
             </a:r>
           </a:p>
         </p:txBody>
@@ -9449,7 +9449,7 @@
               <a:t>1.1  </a:t>
             </a:r>
             <a:r>
-              <a:t>하남시 심야 버스 20대</a:t>
+              <a:t>하남시 심야버스 운영안</a:t>
             </a:r>
           </a:p>
           <a:p>
@@ -9524,7 +9524,7 @@
           <a:lstStyle/>
           <a:p>
             <a:r>
-              <a:t>1.1 하남시 심야 버스 20대</a:t>
+              <a:t>1.1 하남시 심야버스 운영안</a:t>
             </a:r>
           </a:p>
         </p:txBody>
@@ -9545,7 +9545,7 @@
           <a:lstStyle/>
           <a:p>
             <a:r>
-              <a:t>1. 도입과 학습 목표</a:t>
+              <a:t>1. 운행계획 비교</a:t>
             </a:r>
           </a:p>
         </p:txBody>
@@ -9699,7 +9699,7 @@
           <a:lstStyle/>
           <a:p>
             <a:r>
-              <a:t>1. 도입과 학습 목표</a:t>
+              <a:t>1. 운행계획 비교</a:t>
             </a:r>
           </a:p>
         </p:txBody>
@@ -9847,7 +9847,7 @@
           <a:lstStyle/>
           <a:p>
             <a:r>
-              <a:t>1. 도입과 학습 목표</a:t>
+              <a:t>1. 운행계획 비교</a:t>
             </a:r>
           </a:p>
         </p:txBody>
@@ -10254,7 +10254,7 @@
           <a:lstStyle/>
           <a:p>
             <a:r>
-              <a:t>교재 1.1 좋은 모빌리티 시스템</a:t>
+              <a:t>교재 1.1 모빌리티 평가 관점</a:t>
             </a:r>
           </a:p>
         </p:txBody>
@@ -10288,7 +10288,7 @@
               <a:t>2.1  </a:t>
             </a:r>
             <a:r>
-              <a:t>관점에 따라 갈리는 좋음</a:t>
+              <a:t>관점별 평가 기준</a:t>
             </a:r>
           </a:p>
         </p:txBody>
@@ -10327,7 +10327,7 @@
           <a:lstStyle/>
           <a:p>
             <a:r>
-              <a:t>2.1 관점에 따라 갈리는 좋음</a:t>
+              <a:t>2.1 관점별 평가 기준</a:t>
             </a:r>
           </a:p>
         </p:txBody>
@@ -10348,7 +10348,7 @@
           <a:lstStyle/>
           <a:p>
             <a:r>
-              <a:t>2. 교재 1.1 좋은 모빌리티 시스템</a:t>
+              <a:t>2. 교재 1.1 모빌리티 평가 관점</a:t>
             </a:r>
           </a:p>
         </p:txBody>
@@ -10370,7 +10370,7 @@
           <a:p>
             <a:pPr/>
             <a:r>
-              <a:t>대상: 사람과 물건의 이동에 쓰는 수단과 운영 체계</a:t>
+              <a:t>모빌리티 시스템: 사람과 물건의 이동 수단과 운영 체계</a:t>
             </a:r>
           </a:p>
           <a:p>
@@ -10382,13 +10382,13 @@
           <a:p>
             <a:pPr/>
             <a:r>
-              <a:t>충돌: 증차 → 대기 감소, 빈 차 증가</a:t>
+              <a:t>관점 간 충돌: 증차 → 대기시간 감소, 빈 차량 증가</a:t>
             </a:r>
           </a:p>
           <a:p>
             <a:pPr/>
             <a:r>
-              <a:t>비교 방법: 증차 10대 시 대기시간과 빈 차량 수를 함께 계산</a:t>
+              <a:t>비교 예시: 차량 10대 증차 전후의 대기시간과 빈 차량 수</a:t>
             </a:r>
           </a:p>
         </p:txBody>
@@ -10700,7 +10700,7 @@
                           </a:solidFill>
                           <a:latin typeface="Pretendard Medium"/>
                         </a:rPr>
-                        <a:t>차량 가동 극대화</a:t>
+                        <a:t>운행 효율 향상</a:t>
                       </a:r>
                     </a:p>
                   </a:txBody>
@@ -11012,7 +11012,7 @@
               <a:t>3.1  </a:t>
             </a:r>
             <a:r>
-              <a:t>한 달 운영으로 얻는 것</a:t>
+              <a:t>실제 운영 자료의 한계</a:t>
             </a:r>
           </a:p>
           <a:p>
@@ -11048,7 +11048,7 @@
               <a:t>3.3  </a:t>
             </a:r>
             <a:r>
-              <a:t>이 책 모형의 범위와 재료</a:t>
+              <a:t>수업에서 구현할 모형의 범위</a:t>
             </a:r>
           </a:p>
         </p:txBody>
